--- a/slides/pptx/week11.pptx
+++ b/slides/pptx/week11.pptx
@@ -1218,7 +1218,7 @@
           <a:p>
             <a:r>
               <a:rPr lang="en-US" dirty="0"/>
-              <a:t>Map the family. Note these aren't only stack overflows — UAF (free then use) and format-string are just as exploitable. CWE-787 (out-of-bounds write) is consistently the top-1 in the CWE Top 25. ~3 min.</a:t>
+              <a:t>Map the family — these four are what's actually in vuln.c/fuzz_harness.c, verified against the source. UAF and off-by-one are legitimate classes worth mentioning exist, but don't cite them as "this week's bug classes" — nothing here demonstrates them. CWE-121 (this week's actual bug) ranks #14 in the 2025 CWE Top 25 — a stronger, on-topic stat than the old CWE-787-was-#1 line, which is now #5. ~3 min.</a:t>
             </a:r>
             <a:endParaRPr lang="en-US" dirty="0"/>
           </a:p>
@@ -1394,7 +1394,7 @@
           <a:p>
             <a:r>
               <a:rPr lang="en-US" dirty="0"/>
-              <a:t>Walk the exploit method. Cyclic pattern (De Bruijn) tells you EXACTLY how many bytes until the return address. Then overwrite it with the address of win(). Format string: %x leaks stack, %n writes — a primitive most students haven't seen. This is round 2 (pwn). ~6 min.</a:t>
+              <a:t>Walk the exploit method. Cyclic pattern (De Bruijn) tells you exactly how many bytes for THIS specific build — stress that 72 is a fact about the unhardened binary, not a fact about the bug; the sim/exploit-chain diagram shows this shift explicitly. Then overwrite it with the address of win(). Format string: %x leaks stack, %n writes — a primitive most students haven't seen. This is round 2 (pwn). ~6 min.</a:t>
             </a:r>
             <a:endParaRPr lang="en-US" dirty="0"/>
           </a:p>
@@ -1482,7 +1482,7 @@
           <a:p>
             <a:r>
               <a:rPr lang="en-US" dirty="0"/>
-              <a:t>Each defense breaks one step of the previous slide: canary detects the overwrite, NX stops shellcode-on-stack, ASLR/PIE hide the addresses. Key honest point: they raise cost, they don't eliminate the bug — attackers chain leaks to defeat them. ~5 min.</a:t>
+              <a:t>THE key correction this slide needed: FORTIFY_SOURCE checks at the copy call, before the function even returns — so on the hardened build it always wins the race against the canary, which only checks at return time. This lab's own interactive sim literally calls "the canary detects it" the week's most reliable wrong answer — don't teach it. NX is a real mitigation but not for THIS exploit (ret2win, no injected shellcode) — say so explicitly rather than implying all four defenses equally harden the one attack just demonstrated. Worksheet Q4 grades naming all four (canary/PIE/NX/FORTIFY) + what each defeats — FORTIFY must be on this slide. ~5 min.</a:t>
             </a:r>
             <a:endParaRPr lang="en-US" dirty="0"/>
           </a:p>
@@ -2277,7 +2277,7 @@
         <p:spPr>
           <a:xfrm>
             <a:off x="1051560" y="1325880"/>
-            <a:ext cx="7589520" cy="384048"/>
+            <a:ext cx="7589520" cy="402336"/>
           </a:xfrm>
           <a:prstGeom prst="rect">
             <a:avLst/>
@@ -2286,7 +2286,9 @@
           <a:ln/>
         </p:spPr>
         <p:txBody>
-          <a:bodyPr wrap="square" lIns="0" tIns="0" rIns="0" bIns="0" rtlCol="0" anchor="ctr"/>
+          <a:bodyPr wrap="square" lIns="0" tIns="0" rIns="0" bIns="0" rtlCol="0" anchor="ctr">
+            <a:normAutofit/>
+          </a:bodyPr>
           <a:lstStyle/>
           <a:p>
             <a:pPr indent="0" marL="0">
@@ -2315,7 +2317,7 @@
         </p:nvSpPr>
         <p:spPr>
           <a:xfrm>
-            <a:off x="502920" y="1783080"/>
+            <a:off x="502920" y="1801368"/>
             <a:ext cx="384048" cy="384048"/>
           </a:xfrm>
           <a:prstGeom prst="ellipse">
@@ -2335,7 +2337,7 @@
         </p:nvSpPr>
         <p:spPr>
           <a:xfrm>
-            <a:off x="502920" y="1783080"/>
+            <a:off x="502920" y="1801368"/>
             <a:ext cx="384048" cy="384048"/>
           </a:xfrm>
           <a:prstGeom prst="rect">
@@ -2374,8 +2376,8 @@
         </p:nvSpPr>
         <p:spPr>
           <a:xfrm>
-            <a:off x="1051560" y="1783080"/>
-            <a:ext cx="7589520" cy="384048"/>
+            <a:off x="1051560" y="1801368"/>
+            <a:ext cx="7589520" cy="402336"/>
           </a:xfrm>
           <a:prstGeom prst="rect">
             <a:avLst/>
@@ -2384,7 +2386,9 @@
           <a:ln/>
         </p:spPr>
         <p:txBody>
-          <a:bodyPr wrap="square" lIns="0" tIns="0" rIns="0" bIns="0" rtlCol="0" anchor="ctr"/>
+          <a:bodyPr wrap="square" lIns="0" tIns="0" rIns="0" bIns="0" rtlCol="0" anchor="ctr">
+            <a:normAutofit/>
+          </a:bodyPr>
           <a:lstStyle/>
           <a:p>
             <a:pPr indent="0" marL="0">
@@ -2413,7 +2417,7 @@
         </p:nvSpPr>
         <p:spPr>
           <a:xfrm>
-            <a:off x="502920" y="2240280"/>
+            <a:off x="502920" y="2276856"/>
             <a:ext cx="384048" cy="384048"/>
           </a:xfrm>
           <a:prstGeom prst="ellipse">
@@ -2433,7 +2437,7 @@
         </p:nvSpPr>
         <p:spPr>
           <a:xfrm>
-            <a:off x="502920" y="2240280"/>
+            <a:off x="502920" y="2276856"/>
             <a:ext cx="384048" cy="384048"/>
           </a:xfrm>
           <a:prstGeom prst="rect">
@@ -2472,8 +2476,8 @@
         </p:nvSpPr>
         <p:spPr>
           <a:xfrm>
-            <a:off x="1051560" y="2240280"/>
-            <a:ext cx="7589520" cy="384048"/>
+            <a:off x="1051560" y="2276856"/>
+            <a:ext cx="7589520" cy="402336"/>
           </a:xfrm>
           <a:prstGeom prst="rect">
             <a:avLst/>
@@ -2482,7 +2486,9 @@
           <a:ln/>
         </p:spPr>
         <p:txBody>
-          <a:bodyPr wrap="square" lIns="0" tIns="0" rIns="0" bIns="0" rtlCol="0" anchor="ctr"/>
+          <a:bodyPr wrap="square" lIns="0" tIns="0" rIns="0" bIns="0" rtlCol="0" anchor="ctr">
+            <a:normAutofit/>
+          </a:bodyPr>
           <a:lstStyle/>
           <a:p>
             <a:pPr indent="0" marL="0">
@@ -2697,11 +2703,11 @@
         <p:spPr>
           <a:xfrm>
             <a:off x="457200" y="1325880"/>
-            <a:ext cx="8229600" cy="822960"/>
+            <a:ext cx="8229600" cy="1097280"/>
           </a:xfrm>
           <a:prstGeom prst="roundRect">
             <a:avLst>
-              <a:gd name="adj" fmla="val 8889"/>
+              <a:gd name="adj" fmla="val 6667"/>
             </a:avLst>
           </a:prstGeom>
           <a:solidFill>
@@ -2719,7 +2725,7 @@
         <p:spPr>
           <a:xfrm>
             <a:off x="731520" y="1325880"/>
-            <a:ext cx="7680960" cy="822960"/>
+            <a:ext cx="7680960" cy="1097280"/>
           </a:xfrm>
           <a:prstGeom prst="rect">
             <a:avLst/>
@@ -2728,7 +2734,9 @@
           <a:ln/>
         </p:spPr>
         <p:txBody>
-          <a:bodyPr wrap="square" lIns="0" tIns="0" rIns="0" bIns="0" rtlCol="0" anchor="ctr"/>
+          <a:bodyPr wrap="square" lIns="0" tIns="0" rIns="0" bIns="0" rtlCol="0" anchor="ctr">
+            <a:normAutofit/>
+          </a:bodyPr>
           <a:lstStyle/>
           <a:p>
             <a:pPr indent="0" marL="0">
@@ -2743,7 +2751,7 @@
                 <a:ea typeface="Calibri" pitchFamily="34" charset="-122"/>
                 <a:cs typeface="Calibri" pitchFamily="34" charset="-120"/>
               </a:rPr>
-              <a:t>📋 Worksheet 11 — labs/week11-memory-safety-exploitation/worksheet.md (Part 3) · kickoff: in the toolbox container (labs/toolbox): clang -fsanitize=address,fuzzer fuzz_harness.c -o fuzz &amp;&amp; ./fuzz</a:t>
+              <a:t>📋 Worksheet 11 — labs/week11-memory-safety-exploitation/worksheet.md (Part 3) · kickoff: in the toolbox container (labs/toolbox — Apple clang has no libFuzzer runtime): clang -g -fsanitize=address,fuzzer fuzz_harness.c -o fuzz &amp;&amp; ./fuzz</a:t>
             </a:r>
             <a:endParaRPr lang="en-US" sz="1400" dirty="0"/>
           </a:p>
@@ -2757,7 +2765,7 @@
         </p:nvSpPr>
         <p:spPr>
           <a:xfrm>
-            <a:off x="457200" y="2313432"/>
+            <a:off x="457200" y="2587752"/>
             <a:ext cx="8229600" cy="1517904"/>
           </a:xfrm>
           <a:prstGeom prst="roundRect">
@@ -2786,7 +2794,7 @@
         </p:nvSpPr>
         <p:spPr>
           <a:xfrm>
-            <a:off x="731520" y="2423160"/>
+            <a:off x="731520" y="2697480"/>
             <a:ext cx="7680960" cy="1298448"/>
           </a:xfrm>
           <a:prstGeom prst="rect">
@@ -2796,7 +2804,9 @@
           <a:ln/>
         </p:spPr>
         <p:txBody>
-          <a:bodyPr wrap="square" lIns="0" tIns="0" rIns="0" bIns="0" rtlCol="0" anchor="t"/>
+          <a:bodyPr wrap="square" lIns="0" tIns="0" rIns="0" bIns="0" rtlCol="0" anchor="t">
+            <a:normAutofit/>
+          </a:bodyPr>
           <a:lstStyle/>
           <a:p>
             <a:pPr marL="342900" indent="-342900">
@@ -3116,7 +3126,9 @@
           <a:ln/>
         </p:spPr>
         <p:txBody>
-          <a:bodyPr wrap="square" lIns="0" tIns="0" rIns="0" bIns="0" rtlCol="0" anchor="t"/>
+          <a:bodyPr wrap="square" lIns="0" tIns="0" rIns="0" bIns="0" rtlCol="0" anchor="t">
+            <a:normAutofit/>
+          </a:bodyPr>
           <a:lstStyle/>
           <a:p>
             <a:pPr marL="342900" indent="-342900">
@@ -3549,7 +3561,9 @@
           <a:ln/>
         </p:spPr>
         <p:txBody>
-          <a:bodyPr wrap="square" lIns="0" tIns="0" rIns="0" bIns="0" rtlCol="0" anchor="t"/>
+          <a:bodyPr wrap="square" lIns="0" tIns="0" rIns="0" bIns="0" rtlCol="0" anchor="t">
+            <a:normAutofit/>
+          </a:bodyPr>
           <a:lstStyle/>
           <a:p>
             <a:pPr marL="342900" indent="-342900">
@@ -3890,7 +3904,9 @@
           <a:ln/>
         </p:spPr>
         <p:txBody>
-          <a:bodyPr wrap="square" lIns="0" tIns="0" rIns="0" bIns="0" rtlCol="0" anchor="t"/>
+          <a:bodyPr wrap="square" lIns="0" tIns="0" rIns="0" bIns="0" rtlCol="0" anchor="t">
+            <a:normAutofit/>
+          </a:bodyPr>
           <a:lstStyle/>
           <a:p>
             <a:pPr marL="342900" indent="-342900">
@@ -4151,11 +4167,11 @@
         <p:spPr>
           <a:xfrm>
             <a:off x="457200" y="1325880"/>
-            <a:ext cx="8229600" cy="786384"/>
+            <a:ext cx="8229600" cy="713232"/>
           </a:xfrm>
           <a:prstGeom prst="roundRect">
             <a:avLst>
-              <a:gd name="adj" fmla="val 6977"/>
+              <a:gd name="adj" fmla="val 7692"/>
             </a:avLst>
           </a:prstGeom>
           <a:solidFill>
@@ -4178,7 +4194,7 @@
         <p:spPr>
           <a:xfrm>
             <a:off x="640080" y="1399032"/>
-            <a:ext cx="7863840" cy="640080"/>
+            <a:ext cx="7863840" cy="566928"/>
           </a:xfrm>
           <a:prstGeom prst="rect">
             <a:avLst/>
@@ -4187,7 +4203,9 @@
           <a:ln/>
         </p:spPr>
         <p:txBody>
-          <a:bodyPr wrap="square" lIns="0" tIns="0" rIns="0" bIns="0" rtlCol="0" anchor="t"/>
+          <a:bodyPr wrap="square" lIns="0" tIns="0" rIns="0" bIns="0" rtlCol="0" anchor="t">
+            <a:normAutofit/>
+          </a:bodyPr>
           <a:lstStyle/>
           <a:p>
             <a:pPr indent="0" marL="0">
@@ -4233,7 +4251,7 @@
         </p:nvSpPr>
         <p:spPr>
           <a:xfrm>
-            <a:off x="457200" y="2276856"/>
+            <a:off x="457200" y="2203704"/>
             <a:ext cx="8229600" cy="896112"/>
           </a:xfrm>
           <a:prstGeom prst="roundRect">
@@ -4262,7 +4280,7 @@
         </p:nvSpPr>
         <p:spPr>
           <a:xfrm>
-            <a:off x="731520" y="2386584"/>
+            <a:off x="731520" y="2313432"/>
             <a:ext cx="7680960" cy="676656"/>
           </a:xfrm>
           <a:prstGeom prst="rect">
@@ -4272,7 +4290,9 @@
           <a:ln/>
         </p:spPr>
         <p:txBody>
-          <a:bodyPr wrap="square" lIns="0" tIns="0" rIns="0" bIns="0" rtlCol="0" anchor="t"/>
+          <a:bodyPr wrap="square" lIns="0" tIns="0" rIns="0" bIns="0" rtlCol="0" anchor="t">
+            <a:normAutofit/>
+          </a:bodyPr>
           <a:lstStyle/>
           <a:p>
             <a:pPr marL="342900" indent="-342900">
@@ -4512,11 +4532,11 @@
         <p:spPr>
           <a:xfrm>
             <a:off x="457200" y="1325880"/>
-            <a:ext cx="8229600" cy="1207008"/>
+            <a:ext cx="8229600" cy="1408176"/>
           </a:xfrm>
           <a:prstGeom prst="roundRect">
             <a:avLst>
-              <a:gd name="adj" fmla="val 6061"/>
+              <a:gd name="adj" fmla="val 5195"/>
             </a:avLst>
           </a:prstGeom>
           <a:solidFill>
@@ -4541,7 +4561,7 @@
         <p:spPr>
           <a:xfrm>
             <a:off x="731520" y="1435608"/>
-            <a:ext cx="7680960" cy="987552"/>
+            <a:ext cx="7680960" cy="1188720"/>
           </a:xfrm>
           <a:prstGeom prst="rect">
             <a:avLst/>
@@ -4550,7 +4570,9 @@
           <a:ln/>
         </p:spPr>
         <p:txBody>
-          <a:bodyPr wrap="square" lIns="0" tIns="0" rIns="0" bIns="0" rtlCol="0" anchor="t"/>
+          <a:bodyPr wrap="square" lIns="0" tIns="0" rIns="0" bIns="0" rtlCol="0" anchor="t">
+            <a:normAutofit/>
+          </a:bodyPr>
           <a:lstStyle/>
           <a:p>
             <a:pPr marL="342900" indent="-342900">
@@ -4590,7 +4612,7 @@
                 <a:ea typeface="Calibri" pitchFamily="34" charset="-122"/>
                 <a:cs typeface="Calibri" pitchFamily="34" charset="-120"/>
               </a:rPr>
-              <a:t>CWE-416 use-after-free · CWE-134 format string</a:t>
+              <a:t>CWE-134 format string · CWE-242 dangerous function (gets())</a:t>
             </a:r>
             <a:endParaRPr lang="en-US" sz="1400" dirty="0"/>
           </a:p>
@@ -4611,7 +4633,7 @@
                 <a:ea typeface="Calibri" pitchFamily="34" charset="-122"/>
                 <a:cs typeface="Calibri" pitchFamily="34" charset="-120"/>
               </a:rPr>
-              <a:t>CWE-193 off-by-one · integer overflow</a:t>
+              <a:t>(this week's binary: no UAF, no off-by-one — those are real bug classes but not in this lab's code)</a:t>
             </a:r>
             <a:endParaRPr lang="en-US" sz="1400" dirty="0"/>
           </a:p>
@@ -4811,11 +4833,11 @@
         <p:spPr>
           <a:xfrm>
             <a:off x="457200" y="1325880"/>
-            <a:ext cx="8229600" cy="786384"/>
+            <a:ext cx="8229600" cy="713232"/>
           </a:xfrm>
           <a:prstGeom prst="roundRect">
             <a:avLst>
-              <a:gd name="adj" fmla="val 6977"/>
+              <a:gd name="adj" fmla="val 7692"/>
             </a:avLst>
           </a:prstGeom>
           <a:solidFill>
@@ -4838,7 +4860,7 @@
         <p:spPr>
           <a:xfrm>
             <a:off x="640080" y="1399032"/>
-            <a:ext cx="7863840" cy="640080"/>
+            <a:ext cx="7863840" cy="566928"/>
           </a:xfrm>
           <a:prstGeom prst="rect">
             <a:avLst/>
@@ -4847,7 +4869,9 @@
           <a:ln/>
         </p:spPr>
         <p:txBody>
-          <a:bodyPr wrap="square" lIns="0" tIns="0" rIns="0" bIns="0" rtlCol="0" anchor="t"/>
+          <a:bodyPr wrap="square" lIns="0" tIns="0" rIns="0" bIns="0" rtlCol="0" anchor="t">
+            <a:normAutofit/>
+          </a:bodyPr>
           <a:lstStyle/>
           <a:p>
             <a:pPr indent="0" marL="0">
@@ -4862,7 +4886,7 @@
                 <a:ea typeface="Courier New" pitchFamily="34" charset="-122"/>
                 <a:cs typeface="Courier New" pitchFamily="34" charset="-120"/>
               </a:rPr>
-              <a:t>clang -fsanitize=address,fuzzer harness.c -o fuzz &amp;&amp; ./fuzz   # libFuzzer</a:t>
+              <a:t>clang -g -fsanitize=address,fuzzer fuzz_harness.c -o fuzz &amp;&amp; ./fuzz   # libFuzzer</a:t>
             </a:r>
             <a:endParaRPr lang="en-US" sz="1150" dirty="0"/>
           </a:p>
@@ -4879,7 +4903,7 @@
                 <a:ea typeface="Courier New" pitchFamily="34" charset="-122"/>
                 <a:cs typeface="Courier New" pitchFamily="34" charset="-120"/>
               </a:rPr>
-              <a:t>afl-fuzz -i seeds -o out -- ./vuln @@                          # AFL++</a:t>
+              <a:t>afl-fuzz -i seeds -o out -- ./vuln @@                                  # AFL++</a:t>
             </a:r>
             <a:endParaRPr lang="en-US" sz="1150" dirty="0"/>
           </a:p>
@@ -4893,7 +4917,7 @@
         </p:nvSpPr>
         <p:spPr>
           <a:xfrm>
-            <a:off x="457200" y="2276856"/>
+            <a:off x="457200" y="2203704"/>
             <a:ext cx="8229600" cy="896112"/>
           </a:xfrm>
           <a:prstGeom prst="roundRect">
@@ -4922,7 +4946,7 @@
         </p:nvSpPr>
         <p:spPr>
           <a:xfrm>
-            <a:off x="731520" y="2386584"/>
+            <a:off x="731520" y="2313432"/>
             <a:ext cx="7680960" cy="676656"/>
           </a:xfrm>
           <a:prstGeom prst="rect">
@@ -4932,7 +4956,9 @@
           <a:ln/>
         </p:spPr>
         <p:txBody>
-          <a:bodyPr wrap="square" lIns="0" tIns="0" rIns="0" bIns="0" rtlCol="0" anchor="t"/>
+          <a:bodyPr wrap="square" lIns="0" tIns="0" rIns="0" bIns="0" rtlCol="0" anchor="t">
+            <a:normAutofit/>
+          </a:bodyPr>
           <a:lstStyle/>
           <a:p>
             <a:pPr marL="342900" indent="-342900">
@@ -5231,7 +5257,7 @@
         <p:spPr>
           <a:xfrm>
             <a:off x="1051560" y="1325880"/>
-            <a:ext cx="7589520" cy="384048"/>
+            <a:ext cx="7589520" cy="914400"/>
           </a:xfrm>
           <a:prstGeom prst="rect">
             <a:avLst/>
@@ -5240,7 +5266,9 @@
           <a:ln/>
         </p:spPr>
         <p:txBody>
-          <a:bodyPr wrap="square" lIns="0" tIns="0" rIns="0" bIns="0" rtlCol="0" anchor="ctr"/>
+          <a:bodyPr wrap="square" lIns="0" tIns="0" rIns="0" bIns="0" rtlCol="0" anchor="ctr">
+            <a:normAutofit/>
+          </a:bodyPr>
           <a:lstStyle/>
           <a:p>
             <a:pPr indent="0" marL="0">
@@ -5255,7 +5283,7 @@
                 <a:ea typeface="Calibri" pitchFamily="34" charset="-122"/>
                 <a:cs typeface="Calibri" pitchFamily="34" charset="-120"/>
               </a:rPr>
-              <a:t>Find offset to return address (cyclic pattern)</a:t>
+              <a:t>Find offset to return address with a cyclic pattern — verify it, don't assume it: this build's offset is 72 bytes, but enabling the stack canary alone moves it to 80 (the canary word sits between buffer and return address)</a:t>
             </a:r>
             <a:endParaRPr lang="en-US" sz="1350" dirty="0"/>
           </a:p>
@@ -5269,7 +5297,7 @@
         </p:nvSpPr>
         <p:spPr>
           <a:xfrm>
-            <a:off x="502920" y="1783080"/>
+            <a:off x="502920" y="2313432"/>
             <a:ext cx="384048" cy="384048"/>
           </a:xfrm>
           <a:prstGeom prst="ellipse">
@@ -5289,7 +5317,7 @@
         </p:nvSpPr>
         <p:spPr>
           <a:xfrm>
-            <a:off x="502920" y="1783080"/>
+            <a:off x="502920" y="2313432"/>
             <a:ext cx="384048" cy="384048"/>
           </a:xfrm>
           <a:prstGeom prst="rect">
@@ -5328,8 +5356,8 @@
         </p:nvSpPr>
         <p:spPr>
           <a:xfrm>
-            <a:off x="1051560" y="1783080"/>
-            <a:ext cx="7589520" cy="384048"/>
+            <a:off x="1051560" y="2313432"/>
+            <a:ext cx="7589520" cy="402336"/>
           </a:xfrm>
           <a:prstGeom prst="rect">
             <a:avLst/>
@@ -5338,7 +5366,9 @@
           <a:ln/>
         </p:spPr>
         <p:txBody>
-          <a:bodyPr wrap="square" lIns="0" tIns="0" rIns="0" bIns="0" rtlCol="0" anchor="ctr"/>
+          <a:bodyPr wrap="square" lIns="0" tIns="0" rIns="0" bIns="0" rtlCol="0" anchor="ctr">
+            <a:normAutofit/>
+          </a:bodyPr>
           <a:lstStyle/>
           <a:p>
             <a:pPr indent="0" marL="0">
@@ -5353,7 +5383,7 @@
                 <a:ea typeface="Calibri" pitchFamily="34" charset="-122"/>
                 <a:cs typeface="Calibri" pitchFamily="34" charset="-120"/>
               </a:rPr>
-              <a:t>Overwrite RA → jump to win() / shellcode</a:t>
+              <a:t>Overwrite RA → jump to win()</a:t>
             </a:r>
             <a:endParaRPr lang="en-US" sz="1350" dirty="0"/>
           </a:p>
@@ -5367,7 +5397,7 @@
         </p:nvSpPr>
         <p:spPr>
           <a:xfrm>
-            <a:off x="502920" y="2240280"/>
+            <a:off x="502920" y="2788920"/>
             <a:ext cx="384048" cy="384048"/>
           </a:xfrm>
           <a:prstGeom prst="ellipse">
@@ -5387,7 +5417,7 @@
         </p:nvSpPr>
         <p:spPr>
           <a:xfrm>
-            <a:off x="502920" y="2240280"/>
+            <a:off x="502920" y="2788920"/>
             <a:ext cx="384048" cy="384048"/>
           </a:xfrm>
           <a:prstGeom prst="rect">
@@ -5426,8 +5456,8 @@
         </p:nvSpPr>
         <p:spPr>
           <a:xfrm>
-            <a:off x="1051560" y="2240280"/>
-            <a:ext cx="7589520" cy="384048"/>
+            <a:off x="1051560" y="2788920"/>
+            <a:ext cx="7589520" cy="402336"/>
           </a:xfrm>
           <a:prstGeom prst="rect">
             <a:avLst/>
@@ -5436,7 +5466,9 @@
           <a:ln/>
         </p:spPr>
         <p:txBody>
-          <a:bodyPr wrap="square" lIns="0" tIns="0" rIns="0" bIns="0" rtlCol="0" anchor="ctr"/>
+          <a:bodyPr wrap="square" lIns="0" tIns="0" rIns="0" bIns="0" rtlCol="0" anchor="ctr">
+            <a:normAutofit/>
+          </a:bodyPr>
           <a:lstStyle/>
           <a:p>
             <a:pPr indent="0" marL="0">
@@ -5651,11 +5683,11 @@
         <p:spPr>
           <a:xfrm>
             <a:off x="457200" y="1325880"/>
-            <a:ext cx="8229600" cy="1828800"/>
+            <a:ext cx="8229600" cy="2834640"/>
           </a:xfrm>
           <a:prstGeom prst="roundRect">
             <a:avLst>
-              <a:gd name="adj" fmla="val 4000"/>
+              <a:gd name="adj" fmla="val 2581"/>
             </a:avLst>
           </a:prstGeom>
           <a:solidFill>
@@ -5680,7 +5712,7 @@
         <p:spPr>
           <a:xfrm>
             <a:off x="731520" y="1435608"/>
-            <a:ext cx="7680960" cy="1609344"/>
+            <a:ext cx="7680960" cy="2615184"/>
           </a:xfrm>
           <a:prstGeom prst="rect">
             <a:avLst/>
@@ -5689,7 +5721,9 @@
           <a:ln/>
         </p:spPr>
         <p:txBody>
-          <a:bodyPr wrap="square" lIns="0" tIns="0" rIns="0" bIns="0" rtlCol="0" anchor="t"/>
+          <a:bodyPr wrap="square" lIns="0" tIns="0" rIns="0" bIns="0" rtlCol="0" anchor="t">
+            <a:normAutofit/>
+          </a:bodyPr>
           <a:lstStyle/>
           <a:p>
             <a:pPr marL="342900" indent="-342900">
@@ -5708,7 +5742,7 @@
                 <a:ea typeface="Calibri" pitchFamily="34" charset="-122"/>
                 <a:cs typeface="Calibri" pitchFamily="34" charset="-120"/>
               </a:rPr>
-              <a:t>Stack canaries — detect overwrite before return</a:t>
+              <a:t>FORTIFY_SOURCE — checks the copy itself, at call time (__strcpy_chk)</a:t>
             </a:r>
             <a:endParaRPr lang="en-US" sz="1400" dirty="0"/>
           </a:p>
@@ -5729,7 +5763,7 @@
                 <a:ea typeface="Calibri" pitchFamily="34" charset="-122"/>
                 <a:cs typeface="Calibri" pitchFamily="34" charset="-120"/>
               </a:rPr>
-              <a:t>ASLR — randomize addresses</a:t>
+              <a:t>Stack canaries — detect overwrite at function return, after the copy already happened</a:t>
             </a:r>
             <a:endParaRPr lang="en-US" sz="1400" dirty="0"/>
           </a:p>
@@ -5750,7 +5784,7 @@
                 <a:ea typeface="Calibri" pitchFamily="34" charset="-122"/>
                 <a:cs typeface="Calibri" pitchFamily="34" charset="-120"/>
               </a:rPr>
-              <a:t>NX/DEP — no code execution on the stack</a:t>
+              <a:t>ASLR / PIE — randomize addresses</a:t>
             </a:r>
             <a:endParaRPr lang="en-US" sz="1400" dirty="0"/>
           </a:p>
@@ -5771,7 +5805,7 @@
                 <a:ea typeface="Calibri" pitchFamily="34" charset="-122"/>
                 <a:cs typeface="Calibri" pitchFamily="34" charset="-120"/>
               </a:rPr>
-              <a:t>PIE — position-independent executables</a:t>
+              <a:t>NX/DEP — blocks executing shellcode planted on the stack — irrelevant to this exploit, which returns into existing code (win()), never injects shellcode</a:t>
             </a:r>
             <a:endParaRPr lang="en-US" sz="1400" dirty="0"/>
           </a:p>
@@ -5792,7 +5826,7 @@
                 <a:ea typeface="Calibri" pitchFamily="34" charset="-122"/>
                 <a:cs typeface="Calibri" pitchFamily="34" charset="-120"/>
               </a:rPr>
-              <a:t>…each makes the same exploit harder</a:t>
+              <a:t>On this lab's hardened build, FORTIFY fires first — *** buffer overflow detected ***: terminated. The canary never gets a chance to speak. Verify the order yourself before teaching it as "canary catches it" — that's the wrong answer this lab's own materials were rewritten to correct.</a:t>
             </a:r>
             <a:endParaRPr lang="en-US" sz="1400" dirty="0"/>
           </a:p>
@@ -6030,7 +6064,9 @@
           <a:ln/>
         </p:spPr>
         <p:txBody>
-          <a:bodyPr wrap="square" lIns="0" tIns="0" rIns="0" bIns="0" rtlCol="0" anchor="t"/>
+          <a:bodyPr wrap="square" lIns="0" tIns="0" rIns="0" bIns="0" rtlCol="0" anchor="t">
+            <a:normAutofit/>
+          </a:bodyPr>
           <a:lstStyle/>
           <a:p>
             <a:pPr marL="342900" indent="-342900">

--- a/slides/pptx/week11.pptx
+++ b/slides/pptx/week11.pptx
@@ -18,9 +18,10 @@
     <p:sldId id="266" r:id="rId12"/>
     <p:sldId id="267" r:id="rId13"/>
     <p:sldId id="268" r:id="rId14"/>
+    <p:sldId id="269" r:id="rId15"/>
   </p:sldIdLst>
   <p:notesMasterIdLst>
-    <p:notesMasterId r:id="rId15"/>
+    <p:notesMasterId r:id="rId16"/>
   </p:notesMasterIdLst>
   <p:sldSz cx="9144000" cy="5143500"/>
   <p:notesSz cx="5143500" cy="9144000"/>
@@ -602,7 +603,7 @@
           <a:p>
             <a:r>
               <a:rPr lang="en-US" dirty="0"/>
-              <a:t>Explain the 3 rounds before lab. Round 1 = instant feedback (it crashes or not). Round 3 (defend + Rust rewrite) is graded and the real lesson. Q6 of the quiz asks for the crashing input + the defense. ~3 min.</a:t>
+              <a:t>The thesis of the week. Mitigations are a treadmill; memory-safe languages END the bug class. Rust's borrow checker makes UAF a compile error, not a CVE. This is exactly where industry + government are steering. ~4 min.</a:t>
             </a:r>
             <a:endParaRPr lang="en-US" dirty="0"/>
           </a:p>
@@ -690,7 +691,7 @@
           <a:p>
             <a:r>
               <a:rPr lang="en-US" dirty="0"/>
-              <a:t>The Rust rewrite + "why it's now impossible" is the key deliverable — it proves they understand the cure, not just the exploit. AI-resilient tasks count.</a:t>
+              <a:t>Explain the 3 rounds before lab. Round 1 = instant feedback (it crashes or not). Round 3 (defend + Rust rewrite) is graded and the real lesson. Q6 of the quiz asks for the crashing input + the defense. ~3 min.</a:t>
             </a:r>
             <a:endParaRPr lang="en-US" dirty="0"/>
           </a:p>
@@ -778,7 +779,7 @@
           <a:p>
             <a:r>
               <a:rPr lang="en-US" dirty="0"/>
-              <a:t>Recap. Cold-call: "why aren't stack canaries enough?" (they detect, don't prevent; bypassable via leaks — the cure is memory safety). ~2 min.</a:t>
+              <a:t>The Rust rewrite + "why it's now impossible" is the key deliverable — it proves they understand the cure, not just the exploit. AI-resilient tasks count.</a:t>
             </a:r>
             <a:endParaRPr lang="en-US" dirty="0"/>
           </a:p>
@@ -866,7 +867,7 @@
           <a:p>
             <a:r>
               <a:rPr lang="en-US" dirty="0"/>
-              <a:t>Cliffhanger: "Next week — one poisoned dependency owns thousands of victims; we'll replay xz and SolarWinds-style attacks."</a:t>
+              <a:t>Recap. Cold-call: "why aren't stack canaries enough?" (they detect, don't prevent; bypassable via leaks — the cure is memory safety). ~2 min.</a:t>
             </a:r>
             <a:endParaRPr lang="en-US" dirty="0"/>
           </a:p>
@@ -890,6 +891,94 @@
             <a:fld id="{F7021451-1387-4CA6-816F-3879F97B5CBC}" type="slidenum">
               <a:rPr lang="en-US"/>
               <a:t>13</a:t>
+            </a:fld>
+            <a:endParaRPr lang="en-US"/>
+          </a:p>
+        </p:txBody>
+      </p:sp>
+    </p:spTree>
+    <p:extLst>
+      <p:ext uri="{BB962C8B-B14F-4D97-AF65-F5344CB8AC3E}">
+        <p14:creationId xmlns:p14="http://schemas.microsoft.com/office/powerpoint/2010/main" val="1024086991"/>
+      </p:ext>
+    </p:extLst>
+  </p:cSld>
+  <p:clrMapOvr>
+    <a:masterClrMapping/>
+  </p:clrMapOvr>
+</p:notes>
+</file>
+
+<file path=ppt/notesSlides/notesSlide14.xml><?xml version="1.0" encoding="utf-8"?>
+<p:notes xmlns:a="http://schemas.openxmlformats.org/drawingml/2006/main" xmlns:r="http://schemas.openxmlformats.org/officeDocument/2006/relationships" xmlns:p="http://schemas.openxmlformats.org/presentationml/2006/main">
+  <p:cSld>
+    <p:spTree>
+      <p:nvGrpSpPr>
+        <p:cNvPr id="1" name=""/>
+        <p:cNvGrpSpPr/>
+        <p:nvPr/>
+      </p:nvGrpSpPr>
+      <p:grpSpPr>
+        <a:xfrm>
+          <a:off x="0" y="0"/>
+          <a:ext cx="0" cy="0"/>
+          <a:chOff x="0" y="0"/>
+          <a:chExt cx="0" cy="0"/>
+        </a:xfrm>
+      </p:grpSpPr>
+      <p:sp>
+        <p:nvSpPr>
+          <p:cNvPr id="2" name="Slide Image Placeholder 1"/>
+          <p:cNvSpPr>
+            <a:spLocks noGrp="1" noRot="1" noChangeAspect="1"/>
+          </p:cNvSpPr>
+          <p:nvPr>
+            <p:ph type="sldImg"/>
+          </p:nvPr>
+        </p:nvSpPr>
+        <p:spPr/>
+      </p:sp>
+      <p:sp>
+        <p:nvSpPr>
+          <p:cNvPr id="3" name="Notes Placeholder 2"/>
+          <p:cNvSpPr>
+            <a:spLocks noGrp="1"/>
+          </p:cNvSpPr>
+          <p:nvPr>
+            <p:ph type="body" idx="1"/>
+          </p:nvPr>
+        </p:nvSpPr>
+        <p:spPr/>
+        <p:txBody>
+          <a:bodyPr/>
+          <a:lstStyle/>
+          <a:p>
+            <a:r>
+              <a:rPr lang="en-US" dirty="0"/>
+              <a:t>Cliffhanger: "Next week — one poisoned dependency owns thousands of victims; we'll replay xz and SolarWinds-style attacks."</a:t>
+            </a:r>
+            <a:endParaRPr lang="en-US" dirty="0"/>
+          </a:p>
+        </p:txBody>
+      </p:sp>
+      <p:sp>
+        <p:nvSpPr>
+          <p:cNvPr id="4" name="Slide Number Placeholder 3"/>
+          <p:cNvSpPr>
+            <a:spLocks noGrp="1"/>
+          </p:cNvSpPr>
+          <p:nvPr>
+            <p:ph type="sldNum" sz="quarter" idx="10"/>
+          </p:nvPr>
+        </p:nvSpPr>
+        <p:spPr/>
+        <p:txBody>
+          <a:bodyPr/>
+          <a:lstStyle/>
+          <a:p>
+            <a:fld id="{F7021451-1387-4CA6-816F-3879F97B5CBC}" type="slidenum">
+              <a:rPr lang="en-US"/>
+              <a:t>14</a:t>
             </a:fld>
             <a:endParaRPr lang="en-US"/>
           </a:p>
@@ -1130,7 +1219,7 @@
           <a:p>
             <a:r>
               <a:rPr lang="en-US" dirty="0"/>
-              <a:t>The worked example — draw the stack on the board. A local buffer sits BELOW the saved return address; writing past the buffer marches upward into the return address. Control the return address = control where the CPU jumps next. This is THE concept of the week. ~8 min.</a:t>
+              <a:t>The worked example — the sim IS the board drawing, live. A local buffer sits BELOW the saved return address; writing past the buffer marches upward into the return address. Control the return address = control where the CPU jumps next. This is THE concept of the week. ~8 min.</a:t>
             </a:r>
             <a:endParaRPr lang="en-US" dirty="0"/>
           </a:p>
@@ -1570,7 +1659,7 @@
           <a:p>
             <a:r>
               <a:rPr lang="en-US" dirty="0"/>
-              <a:t>The thesis of the week. Mitigations are a treadmill; memory-safe languages END the bug class. Rust's borrow checker makes UAF a compile error, not a CVE. This is exactly where industry + government are steering. ~4 min.</a:t>
+              <a:t>Walk it top to bottom exactly once — this is the whole week's argument as one picture: which mitigation actually stops THIS exploit, and in what order they'd fire if more than one were present. Land on the same correction as the last slide: FORTIFY wins the race against the canary, every time, on this build. ~4 min.</a:t>
             </a:r>
             <a:endParaRPr lang="en-US" dirty="0"/>
           </a:p>
@@ -2203,7 +2292,7 @@
                 <a:ea typeface="Arial" pitchFamily="34" charset="-122"/>
                 <a:cs typeface="Arial" pitchFamily="34" charset="-120"/>
               </a:rPr>
-              <a:t>💥 Game — Fuzzing Race → Pwn the Binary</a:t>
+              <a:t>The real fix: memory-safe languages</a:t>
             </a:r>
             <a:endParaRPr lang="en-US" sz="2600" dirty="0"/>
           </a:p>
@@ -2217,16 +2306,25 @@
         </p:nvSpPr>
         <p:spPr>
           <a:xfrm>
-            <a:off x="502920" y="1325880"/>
-            <a:ext cx="384048" cy="384048"/>
-          </a:xfrm>
-          <a:prstGeom prst="ellipse">
-            <a:avLst/>
+            <a:off x="457200" y="1325880"/>
+            <a:ext cx="8229600" cy="1207008"/>
+          </a:xfrm>
+          <a:prstGeom prst="roundRect">
+            <a:avLst>
+              <a:gd name="adj" fmla="val 6061"/>
+            </a:avLst>
           </a:prstGeom>
           <a:solidFill>
-            <a:srgbClr val="E35205"/>
+            <a:srgbClr val="F1F5F9"/>
           </a:solidFill>
           <a:ln/>
+          <a:effectLst>
+            <a:outerShdw sx="100000" sy="100000" kx="0" ky="0" algn="bl" rotWithShape="0" blurRad="76200" dist="25400" dir="5400000">
+              <a:srgbClr val="000000">
+                <a:alpha val="12000"/>
+              </a:srgbClr>
+            </a:outerShdw>
+          </a:effectLst>
         </p:spPr>
       </p:sp>
       <p:sp>
@@ -2237,8 +2335,8 @@
         </p:nvSpPr>
         <p:spPr>
           <a:xfrm>
-            <a:off x="502920" y="1325880"/>
-            <a:ext cx="384048" cy="384048"/>
+            <a:off x="731520" y="1435608"/>
+            <a:ext cx="7680960" cy="987552"/>
           </a:xfrm>
           <a:prstGeom prst="rect">
             <a:avLst/>
@@ -2247,55 +2345,20 @@
           <a:ln/>
         </p:spPr>
         <p:txBody>
-          <a:bodyPr wrap="square" lIns="0" tIns="0" rIns="0" bIns="0" rtlCol="0" anchor="ctr"/>
-          <a:lstStyle/>
-          <a:p>
-            <a:pPr algn="ctr" indent="0" marL="0">
-              <a:buNone/>
-            </a:pPr>
-            <a:r>
-              <a:rPr lang="en-US" sz="1500" b="1" dirty="0">
-                <a:solidFill>
-                  <a:srgbClr val="0E1726"/>
-                </a:solidFill>
-                <a:latin typeface="Arial" pitchFamily="34" charset="0"/>
-                <a:ea typeface="Arial" pitchFamily="34" charset="-122"/>
-                <a:cs typeface="Arial" pitchFamily="34" charset="-120"/>
-              </a:rPr>
-              <a:t>1</a:t>
-            </a:r>
-            <a:endParaRPr lang="en-US" sz="1500" dirty="0"/>
-          </a:p>
-        </p:txBody>
-      </p:sp>
-      <p:sp>
-        <p:nvSpPr>
-          <p:cNvPr id="7" name="Text 4"/>
-          <p:cNvSpPr/>
-          <p:nvPr/>
-        </p:nvSpPr>
-        <p:spPr>
-          <a:xfrm>
-            <a:off x="1051560" y="1325880"/>
-            <a:ext cx="7589520" cy="402336"/>
-          </a:xfrm>
-          <a:prstGeom prst="rect">
-            <a:avLst/>
-          </a:prstGeom>
-          <a:noFill/>
-          <a:ln/>
-        </p:spPr>
-        <p:txBody>
-          <a:bodyPr wrap="square" lIns="0" tIns="0" rIns="0" bIns="0" rtlCol="0" anchor="ctr">
+          <a:bodyPr wrap="square" lIns="0" tIns="0" rIns="0" bIns="0" rtlCol="0" anchor="t">
             <a:normAutofit/>
           </a:bodyPr>
           <a:lstStyle/>
           <a:p>
-            <a:pPr indent="0" marL="0">
-              <a:buNone/>
-            </a:pPr>
-            <a:r>
-              <a:rPr lang="en-US" sz="1350" dirty="0">
+            <a:pPr marL="342900" indent="-342900">
+              <a:spcAft>
+                <a:spcPts val="600"/>
+              </a:spcAft>
+              <a:buSzPct val="100000"/>
+              <a:buChar char="•"/>
+            </a:pPr>
+            <a:r>
+              <a:rPr lang="en-US" sz="1400" dirty="0">
                 <a:solidFill>
                   <a:srgbClr val="1F2937"/>
                 </a:solidFill>
@@ -2303,99 +2366,20 @@
                 <a:ea typeface="Calibri" pitchFamily="34" charset="-122"/>
                 <a:cs typeface="Calibri" pitchFamily="34" charset="-120"/>
               </a:rPr>
-              <a:t>Round 1 (Fuzzing Race): first team to crash the target wins</a:t>
-            </a:r>
-            <a:endParaRPr lang="en-US" sz="1350" dirty="0"/>
-          </a:p>
-        </p:txBody>
-      </p:sp>
-      <p:sp>
-        <p:nvSpPr>
-          <p:cNvPr id="8" name="Shape 5"/>
-          <p:cNvSpPr/>
-          <p:nvPr/>
-        </p:nvSpPr>
-        <p:spPr>
-          <a:xfrm>
-            <a:off x="502920" y="1801368"/>
-            <a:ext cx="384048" cy="384048"/>
-          </a:xfrm>
-          <a:prstGeom prst="ellipse">
-            <a:avLst/>
-          </a:prstGeom>
-          <a:solidFill>
-            <a:srgbClr val="E35205"/>
-          </a:solidFill>
-          <a:ln/>
-        </p:spPr>
-      </p:sp>
-      <p:sp>
-        <p:nvSpPr>
-          <p:cNvPr id="9" name="Text 6"/>
-          <p:cNvSpPr/>
-          <p:nvPr/>
-        </p:nvSpPr>
-        <p:spPr>
-          <a:xfrm>
-            <a:off x="502920" y="1801368"/>
-            <a:ext cx="384048" cy="384048"/>
-          </a:xfrm>
-          <a:prstGeom prst="rect">
-            <a:avLst/>
-          </a:prstGeom>
-          <a:noFill/>
-          <a:ln/>
-        </p:spPr>
-        <p:txBody>
-          <a:bodyPr wrap="square" lIns="0" tIns="0" rIns="0" bIns="0" rtlCol="0" anchor="ctr"/>
-          <a:lstStyle/>
-          <a:p>
-            <a:pPr algn="ctr" indent="0" marL="0">
-              <a:buNone/>
-            </a:pPr>
-            <a:r>
-              <a:rPr lang="en-US" sz="1500" b="1" dirty="0">
-                <a:solidFill>
-                  <a:srgbClr val="0E1726"/>
-                </a:solidFill>
-                <a:latin typeface="Arial" pitchFamily="34" charset="0"/>
-                <a:ea typeface="Arial" pitchFamily="34" charset="-122"/>
-                <a:cs typeface="Arial" pitchFamily="34" charset="-120"/>
-              </a:rPr>
-              <a:t>2</a:t>
-            </a:r>
-            <a:endParaRPr lang="en-US" sz="1500" dirty="0"/>
-          </a:p>
-        </p:txBody>
-      </p:sp>
-      <p:sp>
-        <p:nvSpPr>
-          <p:cNvPr id="10" name="Text 7"/>
-          <p:cNvSpPr/>
-          <p:nvPr/>
-        </p:nvSpPr>
-        <p:spPr>
-          <a:xfrm>
-            <a:off x="1051560" y="1801368"/>
-            <a:ext cx="7589520" cy="402336"/>
-          </a:xfrm>
-          <a:prstGeom prst="rect">
-            <a:avLst/>
-          </a:prstGeom>
-          <a:noFill/>
-          <a:ln/>
-        </p:spPr>
-        <p:txBody>
-          <a:bodyPr wrap="square" lIns="0" tIns="0" rIns="0" bIns="0" rtlCol="0" anchor="ctr">
-            <a:normAutofit/>
-          </a:bodyPr>
-          <a:lstStyle/>
-          <a:p>
-            <a:pPr indent="0" marL="0">
-              <a:buNone/>
-            </a:pPr>
-            <a:r>
-              <a:rPr lang="en-US" sz="1350" dirty="0">
+              <a:t>Rust / Go remove whole bug classes by design</a:t>
+            </a:r>
+            <a:endParaRPr lang="en-US" sz="1400" dirty="0"/>
+          </a:p>
+          <a:p>
+            <a:pPr marL="342900" indent="-342900">
+              <a:spcAft>
+                <a:spcPts val="600"/>
+              </a:spcAft>
+              <a:buSzPct val="100000"/>
+              <a:buChar char="•"/>
+            </a:pPr>
+            <a:r>
+              <a:rPr lang="en-US" sz="1400" dirty="0">
                 <a:solidFill>
                   <a:srgbClr val="1F2937"/>
                 </a:solidFill>
@@ -2403,99 +2387,20 @@
                 <a:ea typeface="Calibri" pitchFamily="34" charset="-122"/>
                 <a:cs typeface="Calibri" pitchFamily="34" charset="-120"/>
               </a:rPr>
-              <a:t>Round 2 (Pwn): exploit the overflow / format string</a:t>
-            </a:r>
-            <a:endParaRPr lang="en-US" sz="1350" dirty="0"/>
-          </a:p>
-        </p:txBody>
-      </p:sp>
-      <p:sp>
-        <p:nvSpPr>
-          <p:cNvPr id="11" name="Shape 8"/>
-          <p:cNvSpPr/>
-          <p:nvPr/>
-        </p:nvSpPr>
-        <p:spPr>
-          <a:xfrm>
-            <a:off x="502920" y="2276856"/>
-            <a:ext cx="384048" cy="384048"/>
-          </a:xfrm>
-          <a:prstGeom prst="ellipse">
-            <a:avLst/>
-          </a:prstGeom>
-          <a:solidFill>
-            <a:srgbClr val="E35205"/>
-          </a:solidFill>
-          <a:ln/>
-        </p:spPr>
-      </p:sp>
-      <p:sp>
-        <p:nvSpPr>
-          <p:cNvPr id="12" name="Text 9"/>
-          <p:cNvSpPr/>
-          <p:nvPr/>
-        </p:nvSpPr>
-        <p:spPr>
-          <a:xfrm>
-            <a:off x="502920" y="2276856"/>
-            <a:ext cx="384048" cy="384048"/>
-          </a:xfrm>
-          <a:prstGeom prst="rect">
-            <a:avLst/>
-          </a:prstGeom>
-          <a:noFill/>
-          <a:ln/>
-        </p:spPr>
-        <p:txBody>
-          <a:bodyPr wrap="square" lIns="0" tIns="0" rIns="0" bIns="0" rtlCol="0" anchor="ctr"/>
-          <a:lstStyle/>
-          <a:p>
-            <a:pPr algn="ctr" indent="0" marL="0">
-              <a:buNone/>
-            </a:pPr>
-            <a:r>
-              <a:rPr lang="en-US" sz="1500" b="1" dirty="0">
-                <a:solidFill>
-                  <a:srgbClr val="0E1726"/>
-                </a:solidFill>
-                <a:latin typeface="Arial" pitchFamily="34" charset="0"/>
-                <a:ea typeface="Arial" pitchFamily="34" charset="-122"/>
-                <a:cs typeface="Arial" pitchFamily="34" charset="-120"/>
-              </a:rPr>
-              <a:t>3</a:t>
-            </a:r>
-            <a:endParaRPr lang="en-US" sz="1500" dirty="0"/>
-          </a:p>
-        </p:txBody>
-      </p:sp>
-      <p:sp>
-        <p:nvSpPr>
-          <p:cNvPr id="13" name="Text 10"/>
-          <p:cNvSpPr/>
-          <p:nvPr/>
-        </p:nvSpPr>
-        <p:spPr>
-          <a:xfrm>
-            <a:off x="1051560" y="2276856"/>
-            <a:ext cx="7589520" cy="402336"/>
-          </a:xfrm>
-          <a:prstGeom prst="rect">
-            <a:avLst/>
-          </a:prstGeom>
-          <a:noFill/>
-          <a:ln/>
-        </p:spPr>
-        <p:txBody>
-          <a:bodyPr wrap="square" lIns="0" tIns="0" rIns="0" bIns="0" rtlCol="0" anchor="ctr">
-            <a:normAutofit/>
-          </a:bodyPr>
-          <a:lstStyle/>
-          <a:p>
-            <a:pPr indent="0" marL="0">
-              <a:buNone/>
-            </a:pPr>
-            <a:r>
-              <a:rPr lang="en-US" sz="1350" dirty="0">
+              <a:t>CISA "Secure by Design" + ONCD: move off C/C++ for new code</a:t>
+            </a:r>
+            <a:endParaRPr lang="en-US" sz="1400" dirty="0"/>
+          </a:p>
+          <a:p>
+            <a:pPr marL="342900" indent="-342900">
+              <a:spcAft>
+                <a:spcPts val="600"/>
+              </a:spcAft>
+              <a:buSzPct val="100000"/>
+              <a:buChar char="•"/>
+            </a:pPr>
+            <a:r>
+              <a:rPr lang="en-US" sz="1400" dirty="0">
                 <a:solidFill>
                   <a:srgbClr val="1F2937"/>
                 </a:solidFill>
@@ -2503,15 +2408,15 @@
                 <a:ea typeface="Calibri" pitchFamily="34" charset="-122"/>
                 <a:cs typeface="Calibri" pitchFamily="34" charset="-120"/>
               </a:rPr>
-              <a:t>Round 3 (Defend): rebuild with canary+ASLR+PIE, then rewrite in Rust</a:t>
-            </a:r>
-            <a:endParaRPr lang="en-US" sz="1350" dirty="0"/>
-          </a:p>
-        </p:txBody>
-      </p:sp>
-      <p:sp>
-        <p:nvSpPr>
-          <p:cNvPr id="14" name="Text 11"/>
+              <a:t>Borrow checker / bounds checks = no overflow, no UAF</a:t>
+            </a:r>
+            <a:endParaRPr lang="en-US" sz="1400" dirty="0"/>
+          </a:p>
+        </p:txBody>
+      </p:sp>
+      <p:sp>
+        <p:nvSpPr>
+          <p:cNvPr id="7" name="Text 4"/>
           <p:cNvSpPr/>
           <p:nvPr/>
         </p:nvSpPr>
@@ -2550,7 +2455,7 @@
       </p:sp>
       <p:pic>
         <p:nvPicPr>
-          <p:cNvPr id="15" name="Image 1" descr="/Users/pop7/Library/CloudStorage/OneDrive-MonsterConnectCo.,Ltd/Lecture/KOSEN69 - software-security/slides/pptx/assets/logo-small.png">    </p:cNvPr>
+          <p:cNvPr id="8" name="Image 1" descr="/Users/pop7/Library/CloudStorage/OneDrive-MonsterConnectCo.,Ltd/Lecture/KOSEN69 - software-security/slides/pptx/assets/logo-small.png">    </p:cNvPr>
           <p:cNvPicPr>
             <a:picLocks noChangeAspect="1"/>
           </p:cNvPicPr>
@@ -2688,7 +2593,7 @@
                 <a:ea typeface="Arial" pitchFamily="34" charset="-122"/>
                 <a:cs typeface="Arial" pitchFamily="34" charset="-120"/>
               </a:rPr>
-              <a:t>Deliverable</a:t>
+              <a:t>💥 Game — Fuzzing Race → Pwn the Binary</a:t>
             </a:r>
             <a:endParaRPr lang="en-US" sz="2600" dirty="0"/>
           </a:p>
@@ -2702,16 +2607,14 @@
         </p:nvSpPr>
         <p:spPr>
           <a:xfrm>
-            <a:off x="457200" y="1325880"/>
-            <a:ext cx="8229600" cy="1097280"/>
-          </a:xfrm>
-          <a:prstGeom prst="roundRect">
-            <a:avLst>
-              <a:gd name="adj" fmla="val 6667"/>
-            </a:avLst>
+            <a:off x="502920" y="1325880"/>
+            <a:ext cx="384048" cy="384048"/>
+          </a:xfrm>
+          <a:prstGeom prst="ellipse">
+            <a:avLst/>
           </a:prstGeom>
           <a:solidFill>
-            <a:srgbClr val="E8EDF3"/>
+            <a:srgbClr val="E35205"/>
           </a:solidFill>
           <a:ln/>
         </p:spPr>
@@ -2724,8 +2627,47 @@
         </p:nvSpPr>
         <p:spPr>
           <a:xfrm>
-            <a:off x="731520" y="1325880"/>
-            <a:ext cx="7680960" cy="1097280"/>
+            <a:off x="502920" y="1325880"/>
+            <a:ext cx="384048" cy="384048"/>
+          </a:xfrm>
+          <a:prstGeom prst="rect">
+            <a:avLst/>
+          </a:prstGeom>
+          <a:noFill/>
+          <a:ln/>
+        </p:spPr>
+        <p:txBody>
+          <a:bodyPr wrap="square" lIns="0" tIns="0" rIns="0" bIns="0" rtlCol="0" anchor="ctr"/>
+          <a:lstStyle/>
+          <a:p>
+            <a:pPr algn="ctr" indent="0" marL="0">
+              <a:buNone/>
+            </a:pPr>
+            <a:r>
+              <a:rPr lang="en-US" sz="1500" b="1" dirty="0">
+                <a:solidFill>
+                  <a:srgbClr val="0E1726"/>
+                </a:solidFill>
+                <a:latin typeface="Arial" pitchFamily="34" charset="0"/>
+                <a:ea typeface="Arial" pitchFamily="34" charset="-122"/>
+                <a:cs typeface="Arial" pitchFamily="34" charset="-120"/>
+              </a:rPr>
+              <a:t>1</a:t>
+            </a:r>
+            <a:endParaRPr lang="en-US" sz="1500" dirty="0"/>
+          </a:p>
+        </p:txBody>
+      </p:sp>
+      <p:sp>
+        <p:nvSpPr>
+          <p:cNvPr id="7" name="Text 4"/>
+          <p:cNvSpPr/>
+          <p:nvPr/>
+        </p:nvSpPr>
+        <p:spPr>
+          <a:xfrm>
+            <a:off x="1051560" y="1325880"/>
+            <a:ext cx="7589520" cy="402336"/>
           </a:xfrm>
           <a:prstGeom prst="rect">
             <a:avLst/>
@@ -2743,59 +2685,50 @@
               <a:buNone/>
             </a:pPr>
             <a:r>
-              <a:rPr lang="en-US" sz="1400" i="1" dirty="0">
-                <a:solidFill>
-                  <a:srgbClr val="E35205"/>
+              <a:rPr lang="en-US" sz="1350" dirty="0">
+                <a:solidFill>
+                  <a:srgbClr val="1F2937"/>
                 </a:solidFill>
                 <a:latin typeface="Calibri" pitchFamily="34" charset="0"/>
                 <a:ea typeface="Calibri" pitchFamily="34" charset="-122"/>
                 <a:cs typeface="Calibri" pitchFamily="34" charset="-120"/>
               </a:rPr>
-              <a:t>📋 Worksheet 11 — labs/week11-memory-safety-exploitation/worksheet.md (Part 3) · kickoff: in the toolbox container (labs/toolbox — Apple clang has no libFuzzer runtime): clang -g -fsanitize=address,fuzzer fuzz_harness.c -o fuzz &amp;&amp; ./fuzz</a:t>
-            </a:r>
-            <a:endParaRPr lang="en-US" sz="1400" dirty="0"/>
-          </a:p>
-        </p:txBody>
-      </p:sp>
-      <p:sp>
-        <p:nvSpPr>
-          <p:cNvPr id="7" name="Shape 4"/>
-          <p:cNvSpPr/>
-          <p:nvPr/>
-        </p:nvSpPr>
-        <p:spPr>
-          <a:xfrm>
-            <a:off x="457200" y="2587752"/>
-            <a:ext cx="8229600" cy="1517904"/>
-          </a:xfrm>
-          <a:prstGeom prst="roundRect">
-            <a:avLst>
-              <a:gd name="adj" fmla="val 4819"/>
-            </a:avLst>
+              <a:t>Round 1 (Fuzzing Race): first team to crash the target wins</a:t>
+            </a:r>
+            <a:endParaRPr lang="en-US" sz="1350" dirty="0"/>
+          </a:p>
+        </p:txBody>
+      </p:sp>
+      <p:sp>
+        <p:nvSpPr>
+          <p:cNvPr id="8" name="Shape 5"/>
+          <p:cNvSpPr/>
+          <p:nvPr/>
+        </p:nvSpPr>
+        <p:spPr>
+          <a:xfrm>
+            <a:off x="502920" y="1801368"/>
+            <a:ext cx="384048" cy="384048"/>
+          </a:xfrm>
+          <a:prstGeom prst="ellipse">
+            <a:avLst/>
           </a:prstGeom>
           <a:solidFill>
-            <a:srgbClr val="F1F5F9"/>
+            <a:srgbClr val="E35205"/>
           </a:solidFill>
           <a:ln/>
-          <a:effectLst>
-            <a:outerShdw sx="100000" sy="100000" kx="0" ky="0" algn="bl" rotWithShape="0" blurRad="76200" dist="25400" dir="5400000">
-              <a:srgbClr val="000000">
-                <a:alpha val="12000"/>
-              </a:srgbClr>
-            </a:outerShdw>
-          </a:effectLst>
-        </p:spPr>
-      </p:sp>
-      <p:sp>
-        <p:nvSpPr>
-          <p:cNvPr id="8" name="Text 5"/>
-          <p:cNvSpPr/>
-          <p:nvPr/>
-        </p:nvSpPr>
-        <p:spPr>
-          <a:xfrm>
-            <a:off x="731520" y="2697480"/>
-            <a:ext cx="7680960" cy="1298448"/>
+        </p:spPr>
+      </p:sp>
+      <p:sp>
+        <p:nvSpPr>
+          <p:cNvPr id="9" name="Text 6"/>
+          <p:cNvSpPr/>
+          <p:nvPr/>
+        </p:nvSpPr>
+        <p:spPr>
+          <a:xfrm>
+            <a:off x="502920" y="1801368"/>
+            <a:ext cx="384048" cy="384048"/>
           </a:xfrm>
           <a:prstGeom prst="rect">
             <a:avLst/>
@@ -2804,20 +2737,55 @@
           <a:ln/>
         </p:spPr>
         <p:txBody>
-          <a:bodyPr wrap="square" lIns="0" tIns="0" rIns="0" bIns="0" rtlCol="0" anchor="t">
+          <a:bodyPr wrap="square" lIns="0" tIns="0" rIns="0" bIns="0" rtlCol="0" anchor="ctr"/>
+          <a:lstStyle/>
+          <a:p>
+            <a:pPr algn="ctr" indent="0" marL="0">
+              <a:buNone/>
+            </a:pPr>
+            <a:r>
+              <a:rPr lang="en-US" sz="1500" b="1" dirty="0">
+                <a:solidFill>
+                  <a:srgbClr val="0E1726"/>
+                </a:solidFill>
+                <a:latin typeface="Arial" pitchFamily="34" charset="0"/>
+                <a:ea typeface="Arial" pitchFamily="34" charset="-122"/>
+                <a:cs typeface="Arial" pitchFamily="34" charset="-120"/>
+              </a:rPr>
+              <a:t>2</a:t>
+            </a:r>
+            <a:endParaRPr lang="en-US" sz="1500" dirty="0"/>
+          </a:p>
+        </p:txBody>
+      </p:sp>
+      <p:sp>
+        <p:nvSpPr>
+          <p:cNvPr id="10" name="Text 7"/>
+          <p:cNvSpPr/>
+          <p:nvPr/>
+        </p:nvSpPr>
+        <p:spPr>
+          <a:xfrm>
+            <a:off x="1051560" y="1801368"/>
+            <a:ext cx="7589520" cy="402336"/>
+          </a:xfrm>
+          <a:prstGeom prst="rect">
+            <a:avLst/>
+          </a:prstGeom>
+          <a:noFill/>
+          <a:ln/>
+        </p:spPr>
+        <p:txBody>
+          <a:bodyPr wrap="square" lIns="0" tIns="0" rIns="0" bIns="0" rtlCol="0" anchor="ctr">
             <a:normAutofit/>
           </a:bodyPr>
           <a:lstStyle/>
           <a:p>
-            <a:pPr marL="342900" indent="-342900">
-              <a:spcAft>
-                <a:spcPts val="600"/>
-              </a:spcAft>
-              <a:buSzPct val="100000"/>
-              <a:buChar char="•"/>
-            </a:pPr>
-            <a:r>
-              <a:rPr lang="en-US" sz="1400" dirty="0">
+            <a:pPr indent="0" marL="0">
+              <a:buNone/>
+            </a:pPr>
+            <a:r>
+              <a:rPr lang="en-US" sz="1350" dirty="0">
                 <a:solidFill>
                   <a:srgbClr val="1F2937"/>
                 </a:solidFill>
@@ -2825,20 +2793,99 @@
                 <a:ea typeface="Calibri" pitchFamily="34" charset="-122"/>
                 <a:cs typeface="Calibri" pitchFamily="34" charset="-120"/>
               </a:rPr>
-              <a:t>Fuzzing crash + exploit script</a:t>
-            </a:r>
-            <a:endParaRPr lang="en-US" sz="1400" dirty="0"/>
-          </a:p>
-          <a:p>
-            <a:pPr marL="342900" indent="-342900">
-              <a:spcAft>
-                <a:spcPts val="600"/>
-              </a:spcAft>
-              <a:buSzPct val="100000"/>
-              <a:buChar char="•"/>
-            </a:pPr>
-            <a:r>
-              <a:rPr lang="en-US" sz="1400" dirty="0">
+              <a:t>Round 2 (Pwn): exploit the overflow / format string</a:t>
+            </a:r>
+            <a:endParaRPr lang="en-US" sz="1350" dirty="0"/>
+          </a:p>
+        </p:txBody>
+      </p:sp>
+      <p:sp>
+        <p:nvSpPr>
+          <p:cNvPr id="11" name="Shape 8"/>
+          <p:cNvSpPr/>
+          <p:nvPr/>
+        </p:nvSpPr>
+        <p:spPr>
+          <a:xfrm>
+            <a:off x="502920" y="2276856"/>
+            <a:ext cx="384048" cy="384048"/>
+          </a:xfrm>
+          <a:prstGeom prst="ellipse">
+            <a:avLst/>
+          </a:prstGeom>
+          <a:solidFill>
+            <a:srgbClr val="E35205"/>
+          </a:solidFill>
+          <a:ln/>
+        </p:spPr>
+      </p:sp>
+      <p:sp>
+        <p:nvSpPr>
+          <p:cNvPr id="12" name="Text 9"/>
+          <p:cNvSpPr/>
+          <p:nvPr/>
+        </p:nvSpPr>
+        <p:spPr>
+          <a:xfrm>
+            <a:off x="502920" y="2276856"/>
+            <a:ext cx="384048" cy="384048"/>
+          </a:xfrm>
+          <a:prstGeom prst="rect">
+            <a:avLst/>
+          </a:prstGeom>
+          <a:noFill/>
+          <a:ln/>
+        </p:spPr>
+        <p:txBody>
+          <a:bodyPr wrap="square" lIns="0" tIns="0" rIns="0" bIns="0" rtlCol="0" anchor="ctr"/>
+          <a:lstStyle/>
+          <a:p>
+            <a:pPr algn="ctr" indent="0" marL="0">
+              <a:buNone/>
+            </a:pPr>
+            <a:r>
+              <a:rPr lang="en-US" sz="1500" b="1" dirty="0">
+                <a:solidFill>
+                  <a:srgbClr val="0E1726"/>
+                </a:solidFill>
+                <a:latin typeface="Arial" pitchFamily="34" charset="0"/>
+                <a:ea typeface="Arial" pitchFamily="34" charset="-122"/>
+                <a:cs typeface="Arial" pitchFamily="34" charset="-120"/>
+              </a:rPr>
+              <a:t>3</a:t>
+            </a:r>
+            <a:endParaRPr lang="en-US" sz="1500" dirty="0"/>
+          </a:p>
+        </p:txBody>
+      </p:sp>
+      <p:sp>
+        <p:nvSpPr>
+          <p:cNvPr id="13" name="Text 10"/>
+          <p:cNvSpPr/>
+          <p:nvPr/>
+        </p:nvSpPr>
+        <p:spPr>
+          <a:xfrm>
+            <a:off x="1051560" y="2276856"/>
+            <a:ext cx="7589520" cy="402336"/>
+          </a:xfrm>
+          <a:prstGeom prst="rect">
+            <a:avLst/>
+          </a:prstGeom>
+          <a:noFill/>
+          <a:ln/>
+        </p:spPr>
+        <p:txBody>
+          <a:bodyPr wrap="square" lIns="0" tIns="0" rIns="0" bIns="0" rtlCol="0" anchor="ctr">
+            <a:normAutofit/>
+          </a:bodyPr>
+          <a:lstStyle/>
+          <a:p>
+            <a:pPr indent="0" marL="0">
+              <a:buNone/>
+            </a:pPr>
+            <a:r>
+              <a:rPr lang="en-US" sz="1350" dirty="0">
                 <a:solidFill>
                   <a:srgbClr val="1F2937"/>
                 </a:solidFill>
@@ -2846,87 +2893,45 @@
                 <a:ea typeface="Calibri" pitchFamily="34" charset="-122"/>
                 <a:cs typeface="Calibri" pitchFamily="34" charset="-120"/>
               </a:rPr>
-              <a:t>Annotated Ghidra/gdb analysis</a:t>
-            </a:r>
-            <a:endParaRPr lang="en-US" sz="1400" dirty="0"/>
-          </a:p>
-          <a:p>
-            <a:pPr marL="342900" indent="-342900">
-              <a:spcAft>
-                <a:spcPts val="600"/>
-              </a:spcAft>
-              <a:buSzPct val="100000"/>
-              <a:buChar char="•"/>
-            </a:pPr>
-            <a:r>
-              <a:rPr lang="en-US" sz="1400" dirty="0">
-                <a:solidFill>
-                  <a:srgbClr val="1F2937"/>
+              <a:t>Round 3 (Defend): rebuild with canary+ASLR+PIE, then rewrite in Rust</a:t>
+            </a:r>
+            <a:endParaRPr lang="en-US" sz="1350" dirty="0"/>
+          </a:p>
+        </p:txBody>
+      </p:sp>
+      <p:sp>
+        <p:nvSpPr>
+          <p:cNvPr id="14" name="Text 11"/>
+          <p:cNvSpPr/>
+          <p:nvPr/>
+        </p:nvSpPr>
+        <p:spPr>
+          <a:xfrm>
+            <a:off x="457200" y="4800600"/>
+            <a:ext cx="6949440" cy="274320"/>
+          </a:xfrm>
+          <a:prstGeom prst="rect">
+            <a:avLst/>
+          </a:prstGeom>
+          <a:noFill/>
+          <a:ln/>
+        </p:spPr>
+        <p:txBody>
+          <a:bodyPr wrap="square" lIns="0" tIns="0" rIns="0" bIns="0" rtlCol="0" anchor="ctr"/>
+          <a:lstStyle/>
+          <a:p>
+            <a:pPr indent="0" marL="0">
+              <a:buNone/>
+            </a:pPr>
+            <a:r>
+              <a:rPr lang="en-US" sz="900" dirty="0">
+                <a:solidFill>
+                  <a:srgbClr val="64748B"/>
                 </a:solidFill>
                 <a:latin typeface="Calibri" pitchFamily="34" charset="0"/>
                 <a:ea typeface="Calibri" pitchFamily="34" charset="-122"/>
                 <a:cs typeface="Calibri" pitchFamily="34" charset="-120"/>
               </a:rPr>
-              <a:t>Memory-safe (Rust) rewrite + why the bug is now impossible</a:t>
-            </a:r>
-            <a:endParaRPr lang="en-US" sz="1400" dirty="0"/>
-          </a:p>
-          <a:p>
-            <a:pPr marL="342900" indent="-342900">
-              <a:spcAft>
-                <a:spcPts val="600"/>
-              </a:spcAft>
-              <a:buSzPct val="100000"/>
-              <a:buChar char="•"/>
-            </a:pPr>
-            <a:r>
-              <a:rPr lang="en-US" sz="1400" dirty="0">
-                <a:solidFill>
-                  <a:srgbClr val="1F2937"/>
-                </a:solidFill>
-                <a:latin typeface="Calibri" pitchFamily="34" charset="0"/>
-                <a:ea typeface="Calibri" pitchFamily="34" charset="-122"/>
-                <a:cs typeface="Calibri" pitchFamily="34" charset="-120"/>
-              </a:rPr>
-              <a:t>+ Audit the AI / EiPE / Prompt Problem (see worksheet)</a:t>
-            </a:r>
-            <a:endParaRPr lang="en-US" sz="1400" dirty="0"/>
-          </a:p>
-        </p:txBody>
-      </p:sp>
-      <p:sp>
-        <p:nvSpPr>
-          <p:cNvPr id="9" name="Text 6"/>
-          <p:cNvSpPr/>
-          <p:nvPr/>
-        </p:nvSpPr>
-        <p:spPr>
-          <a:xfrm>
-            <a:off x="457200" y="4800600"/>
-            <a:ext cx="6949440" cy="274320"/>
-          </a:xfrm>
-          <a:prstGeom prst="rect">
-            <a:avLst/>
-          </a:prstGeom>
-          <a:noFill/>
-          <a:ln/>
-        </p:spPr>
-        <p:txBody>
-          <a:bodyPr wrap="square" lIns="0" tIns="0" rIns="0" bIns="0" rtlCol="0" anchor="ctr"/>
-          <a:lstStyle/>
-          <a:p>
-            <a:pPr indent="0" marL="0">
-              <a:buNone/>
-            </a:pPr>
-            <a:r>
-              <a:rPr lang="en-US" sz="900" dirty="0">
-                <a:solidFill>
-                  <a:srgbClr val="64748B"/>
-                </a:solidFill>
-                <a:latin typeface="Calibri" pitchFamily="34" charset="0"/>
-                <a:ea typeface="Calibri" pitchFamily="34" charset="-122"/>
-                <a:cs typeface="Calibri" pitchFamily="34" charset="-120"/>
-              </a:rPr>
               <a:t>Software Security · Week 11</a:t>
             </a:r>
             <a:endParaRPr lang="en-US" sz="900" dirty="0"/>
@@ -2935,7 +2940,7 @@
       </p:sp>
       <p:pic>
         <p:nvPicPr>
-          <p:cNvPr id="10" name="Image 1" descr="/Users/pop7/Library/CloudStorage/OneDrive-MonsterConnectCo.,Ltd/Lecture/KOSEN69 - software-security/slides/pptx/assets/logo-small.png">    </p:cNvPr>
+          <p:cNvPr id="15" name="Image 1" descr="/Users/pop7/Library/CloudStorage/OneDrive-MonsterConnectCo.,Ltd/Lecture/KOSEN69 - software-security/slides/pptx/assets/logo-small.png">    </p:cNvPr>
           <p:cNvPicPr>
             <a:picLocks noChangeAspect="1"/>
           </p:cNvPicPr>
@@ -3073,7 +3078,7 @@
                 <a:ea typeface="Arial" pitchFamily="34" charset="-122"/>
                 <a:cs typeface="Arial" pitchFamily="34" charset="-120"/>
               </a:rPr>
-              <a:t>Key takeaways</a:t>
+              <a:t>Deliverable</a:t>
             </a:r>
             <a:endParaRPr lang="en-US" sz="2600" dirty="0"/>
           </a:p>
@@ -3088,11 +3093,74 @@
         <p:spPr>
           <a:xfrm>
             <a:off x="457200" y="1325880"/>
-            <a:ext cx="8229600" cy="1207008"/>
+            <a:ext cx="8229600" cy="1097280"/>
           </a:xfrm>
           <a:prstGeom prst="roundRect">
             <a:avLst>
-              <a:gd name="adj" fmla="val 6061"/>
+              <a:gd name="adj" fmla="val 6667"/>
+            </a:avLst>
+          </a:prstGeom>
+          <a:solidFill>
+            <a:srgbClr val="E8EDF3"/>
+          </a:solidFill>
+          <a:ln/>
+        </p:spPr>
+      </p:sp>
+      <p:sp>
+        <p:nvSpPr>
+          <p:cNvPr id="6" name="Text 3"/>
+          <p:cNvSpPr/>
+          <p:nvPr/>
+        </p:nvSpPr>
+        <p:spPr>
+          <a:xfrm>
+            <a:off x="731520" y="1325880"/>
+            <a:ext cx="7680960" cy="1097280"/>
+          </a:xfrm>
+          <a:prstGeom prst="rect">
+            <a:avLst/>
+          </a:prstGeom>
+          <a:noFill/>
+          <a:ln/>
+        </p:spPr>
+        <p:txBody>
+          <a:bodyPr wrap="square" lIns="0" tIns="0" rIns="0" bIns="0" rtlCol="0" anchor="ctr">
+            <a:normAutofit/>
+          </a:bodyPr>
+          <a:lstStyle/>
+          <a:p>
+            <a:pPr indent="0" marL="0">
+              <a:buNone/>
+            </a:pPr>
+            <a:r>
+              <a:rPr lang="en-US" sz="1400" i="1" dirty="0">
+                <a:solidFill>
+                  <a:srgbClr val="E35205"/>
+                </a:solidFill>
+                <a:latin typeface="Calibri" pitchFamily="34" charset="0"/>
+                <a:ea typeface="Calibri" pitchFamily="34" charset="-122"/>
+                <a:cs typeface="Calibri" pitchFamily="34" charset="-120"/>
+              </a:rPr>
+              <a:t>📋 Worksheet 11 — labs/week11-memory-safety-exploitation/worksheet.md (Part 3) · kickoff: in the toolbox container (labs/toolbox — Apple clang has no libFuzzer runtime): clang -g -fsanitize=address,fuzzer fuzz_harness.c -o fuzz &amp;&amp; ./fuzz</a:t>
+            </a:r>
+            <a:endParaRPr lang="en-US" sz="1400" dirty="0"/>
+          </a:p>
+        </p:txBody>
+      </p:sp>
+      <p:sp>
+        <p:nvSpPr>
+          <p:cNvPr id="7" name="Shape 4"/>
+          <p:cNvSpPr/>
+          <p:nvPr/>
+        </p:nvSpPr>
+        <p:spPr>
+          <a:xfrm>
+            <a:off x="457200" y="2587752"/>
+            <a:ext cx="8229600" cy="1517904"/>
+          </a:xfrm>
+          <a:prstGeom prst="roundRect">
+            <a:avLst>
+              <a:gd name="adj" fmla="val 4819"/>
             </a:avLst>
           </a:prstGeom>
           <a:solidFill>
@@ -3110,14 +3178,14 @@
       </p:sp>
       <p:sp>
         <p:nvSpPr>
-          <p:cNvPr id="6" name="Text 3"/>
-          <p:cNvSpPr/>
-          <p:nvPr/>
-        </p:nvSpPr>
-        <p:spPr>
-          <a:xfrm>
-            <a:off x="731520" y="1435608"/>
-            <a:ext cx="7680960" cy="987552"/>
+          <p:cNvPr id="8" name="Text 5"/>
+          <p:cNvSpPr/>
+          <p:nvPr/>
+        </p:nvSpPr>
+        <p:spPr>
+          <a:xfrm>
+            <a:off x="731520" y="2697480"/>
+            <a:ext cx="7680960" cy="1298448"/>
           </a:xfrm>
           <a:prstGeom prst="rect">
             <a:avLst/>
@@ -3147,7 +3215,7 @@
                 <a:ea typeface="Calibri" pitchFamily="34" charset="-122"/>
                 <a:cs typeface="Calibri" pitchFamily="34" charset="-120"/>
               </a:rPr>
-              <a:t>Fuzz to find, debug to understand, mitigate to slow attackers</a:t>
+              <a:t>Fuzzing crash + exploit script</a:t>
             </a:r>
             <a:endParaRPr lang="en-US" sz="1400" dirty="0"/>
           </a:p>
@@ -3168,7 +3236,7 @@
                 <a:ea typeface="Calibri" pitchFamily="34" charset="-122"/>
                 <a:cs typeface="Calibri" pitchFamily="34" charset="-120"/>
               </a:rPr>
-              <a:t>Mitigations ≠ cure — memory-safe languages are the cure</a:t>
+              <a:t>Annotated Ghidra/gdb analysis</a:t>
             </a:r>
             <a:endParaRPr lang="en-US" sz="1400" dirty="0"/>
           </a:p>
@@ -3189,45 +3257,66 @@
                 <a:ea typeface="Calibri" pitchFamily="34" charset="-122"/>
                 <a:cs typeface="Calibri" pitchFamily="34" charset="-120"/>
               </a:rPr>
-              <a:t>This is where the industry is moving</a:t>
+              <a:t>Memory-safe (Rust) rewrite + why the bug is now impossible</a:t>
             </a:r>
             <a:endParaRPr lang="en-US" sz="1400" dirty="0"/>
           </a:p>
-        </p:txBody>
-      </p:sp>
-      <p:sp>
-        <p:nvSpPr>
-          <p:cNvPr id="7" name="Text 4"/>
-          <p:cNvSpPr/>
-          <p:nvPr/>
-        </p:nvSpPr>
-        <p:spPr>
-          <a:xfrm>
-            <a:off x="457200" y="4800600"/>
-            <a:ext cx="6949440" cy="274320"/>
-          </a:xfrm>
-          <a:prstGeom prst="rect">
-            <a:avLst/>
-          </a:prstGeom>
-          <a:noFill/>
-          <a:ln/>
-        </p:spPr>
-        <p:txBody>
-          <a:bodyPr wrap="square" lIns="0" tIns="0" rIns="0" bIns="0" rtlCol="0" anchor="ctr"/>
-          <a:lstStyle/>
-          <a:p>
-            <a:pPr indent="0" marL="0">
-              <a:buNone/>
-            </a:pPr>
-            <a:r>
-              <a:rPr lang="en-US" sz="900" dirty="0">
-                <a:solidFill>
-                  <a:srgbClr val="64748B"/>
+          <a:p>
+            <a:pPr marL="342900" indent="-342900">
+              <a:spcAft>
+                <a:spcPts val="600"/>
+              </a:spcAft>
+              <a:buSzPct val="100000"/>
+              <a:buChar char="•"/>
+            </a:pPr>
+            <a:r>
+              <a:rPr lang="en-US" sz="1400" dirty="0">
+                <a:solidFill>
+                  <a:srgbClr val="1F2937"/>
                 </a:solidFill>
                 <a:latin typeface="Calibri" pitchFamily="34" charset="0"/>
                 <a:ea typeface="Calibri" pitchFamily="34" charset="-122"/>
                 <a:cs typeface="Calibri" pitchFamily="34" charset="-120"/>
               </a:rPr>
+              <a:t>+ Audit the AI / EiPE / Prompt Problem (see worksheet)</a:t>
+            </a:r>
+            <a:endParaRPr lang="en-US" sz="1400" dirty="0"/>
+          </a:p>
+        </p:txBody>
+      </p:sp>
+      <p:sp>
+        <p:nvSpPr>
+          <p:cNvPr id="9" name="Text 6"/>
+          <p:cNvSpPr/>
+          <p:nvPr/>
+        </p:nvSpPr>
+        <p:spPr>
+          <a:xfrm>
+            <a:off x="457200" y="4800600"/>
+            <a:ext cx="6949440" cy="274320"/>
+          </a:xfrm>
+          <a:prstGeom prst="rect">
+            <a:avLst/>
+          </a:prstGeom>
+          <a:noFill/>
+          <a:ln/>
+        </p:spPr>
+        <p:txBody>
+          <a:bodyPr wrap="square" lIns="0" tIns="0" rIns="0" bIns="0" rtlCol="0" anchor="ctr"/>
+          <a:lstStyle/>
+          <a:p>
+            <a:pPr indent="0" marL="0">
+              <a:buNone/>
+            </a:pPr>
+            <a:r>
+              <a:rPr lang="en-US" sz="900" dirty="0">
+                <a:solidFill>
+                  <a:srgbClr val="64748B"/>
+                </a:solidFill>
+                <a:latin typeface="Calibri" pitchFamily="34" charset="0"/>
+                <a:ea typeface="Calibri" pitchFamily="34" charset="-122"/>
+                <a:cs typeface="Calibri" pitchFamily="34" charset="-120"/>
+              </a:rPr>
               <a:t>Software Security · Week 11</a:t>
             </a:r>
             <a:endParaRPr lang="en-US" sz="900" dirty="0"/>
@@ -3236,7 +3325,7 @@
       </p:sp>
       <p:pic>
         <p:nvPicPr>
-          <p:cNvPr id="8" name="Image 1" descr="/Users/pop7/Library/CloudStorage/OneDrive-MonsterConnectCo.,Ltd/Lecture/KOSEN69 - software-security/slides/pptx/assets/logo-small.png">    </p:cNvPr>
+          <p:cNvPr id="10" name="Image 1" descr="/Users/pop7/Library/CloudStorage/OneDrive-MonsterConnectCo.,Ltd/Lecture/KOSEN69 - software-security/slides/pptx/assets/logo-small.png">    </p:cNvPr>
           <p:cNvPicPr>
             <a:picLocks noChangeAspect="1"/>
           </p:cNvPicPr>
@@ -3292,6 +3381,307 @@
       </p:grpSpPr>
       <p:sp>
         <p:nvSpPr>
+          <p:cNvPr id="2" name="Shape 0"/>
+          <p:cNvSpPr/>
+          <p:nvPr/>
+        </p:nvSpPr>
+        <p:spPr>
+          <a:xfrm>
+            <a:off x="457200" y="384048"/>
+            <a:ext cx="530352" cy="530352"/>
+          </a:xfrm>
+          <a:prstGeom prst="ellipse">
+            <a:avLst/>
+          </a:prstGeom>
+          <a:solidFill>
+            <a:srgbClr val="E35205"/>
+          </a:solidFill>
+          <a:ln/>
+          <a:effectLst>
+            <a:outerShdw sx="100000" sy="100000" kx="0" ky="0" algn="bl" rotWithShape="0" blurRad="76200" dist="25400" dir="5400000">
+              <a:srgbClr val="000000">
+                <a:alpha val="12000"/>
+              </a:srgbClr>
+            </a:outerShdw>
+          </a:effectLst>
+        </p:spPr>
+      </p:sp>
+      <p:pic>
+        <p:nvPicPr>
+          <p:cNvPr id="3" name="Image 0" descr="preencoded.png">    </p:cNvPr>
+          <p:cNvPicPr>
+            <a:picLocks noChangeAspect="1"/>
+          </p:cNvPicPr>
+          <p:nvPr/>
+        </p:nvPicPr>
+        <p:blipFill>
+          <a:blip r:embed="rId1"/>
+          <a:stretch>
+            <a:fillRect/>
+          </a:stretch>
+        </p:blipFill>
+        <p:spPr>
+          <a:xfrm>
+            <a:off x="594360" y="521208"/>
+            <a:ext cx="256032" cy="256032"/>
+          </a:xfrm>
+          <a:prstGeom prst="rect">
+            <a:avLst/>
+          </a:prstGeom>
+        </p:spPr>
+      </p:pic>
+      <p:sp>
+        <p:nvSpPr>
+          <p:cNvPr id="4" name="Text 1"/>
+          <p:cNvSpPr/>
+          <p:nvPr/>
+        </p:nvSpPr>
+        <p:spPr>
+          <a:xfrm>
+            <a:off x="1143000" y="329184"/>
+            <a:ext cx="7498080" cy="603504"/>
+          </a:xfrm>
+          <a:prstGeom prst="rect">
+            <a:avLst/>
+          </a:prstGeom>
+          <a:noFill/>
+          <a:ln/>
+        </p:spPr>
+        <p:txBody>
+          <a:bodyPr wrap="square" lIns="0" tIns="0" rIns="0" bIns="0" rtlCol="0" anchor="ctr"/>
+          <a:lstStyle/>
+          <a:p>
+            <a:pPr indent="0" marL="0">
+              <a:buNone/>
+            </a:pPr>
+            <a:r>
+              <a:rPr lang="en-US" sz="2600" b="1" dirty="0">
+                <a:solidFill>
+                  <a:srgbClr val="1F2937"/>
+                </a:solidFill>
+                <a:latin typeface="Arial" pitchFamily="34" charset="0"/>
+                <a:ea typeface="Arial" pitchFamily="34" charset="-122"/>
+                <a:cs typeface="Arial" pitchFamily="34" charset="-120"/>
+              </a:rPr>
+              <a:t>Key takeaways</a:t>
+            </a:r>
+            <a:endParaRPr lang="en-US" sz="2600" dirty="0"/>
+          </a:p>
+        </p:txBody>
+      </p:sp>
+      <p:sp>
+        <p:nvSpPr>
+          <p:cNvPr id="5" name="Shape 2"/>
+          <p:cNvSpPr/>
+          <p:nvPr/>
+        </p:nvSpPr>
+        <p:spPr>
+          <a:xfrm>
+            <a:off x="457200" y="1325880"/>
+            <a:ext cx="8229600" cy="1207008"/>
+          </a:xfrm>
+          <a:prstGeom prst="roundRect">
+            <a:avLst>
+              <a:gd name="adj" fmla="val 6061"/>
+            </a:avLst>
+          </a:prstGeom>
+          <a:solidFill>
+            <a:srgbClr val="F1F5F9"/>
+          </a:solidFill>
+          <a:ln/>
+          <a:effectLst>
+            <a:outerShdw sx="100000" sy="100000" kx="0" ky="0" algn="bl" rotWithShape="0" blurRad="76200" dist="25400" dir="5400000">
+              <a:srgbClr val="000000">
+                <a:alpha val="12000"/>
+              </a:srgbClr>
+            </a:outerShdw>
+          </a:effectLst>
+        </p:spPr>
+      </p:sp>
+      <p:sp>
+        <p:nvSpPr>
+          <p:cNvPr id="6" name="Text 3"/>
+          <p:cNvSpPr/>
+          <p:nvPr/>
+        </p:nvSpPr>
+        <p:spPr>
+          <a:xfrm>
+            <a:off x="731520" y="1435608"/>
+            <a:ext cx="7680960" cy="987552"/>
+          </a:xfrm>
+          <a:prstGeom prst="rect">
+            <a:avLst/>
+          </a:prstGeom>
+          <a:noFill/>
+          <a:ln/>
+        </p:spPr>
+        <p:txBody>
+          <a:bodyPr wrap="square" lIns="0" tIns="0" rIns="0" bIns="0" rtlCol="0" anchor="t">
+            <a:normAutofit/>
+          </a:bodyPr>
+          <a:lstStyle/>
+          <a:p>
+            <a:pPr marL="342900" indent="-342900">
+              <a:spcAft>
+                <a:spcPts val="600"/>
+              </a:spcAft>
+              <a:buSzPct val="100000"/>
+              <a:buChar char="•"/>
+            </a:pPr>
+            <a:r>
+              <a:rPr lang="en-US" sz="1400" dirty="0">
+                <a:solidFill>
+                  <a:srgbClr val="1F2937"/>
+                </a:solidFill>
+                <a:latin typeface="Calibri" pitchFamily="34" charset="0"/>
+                <a:ea typeface="Calibri" pitchFamily="34" charset="-122"/>
+                <a:cs typeface="Calibri" pitchFamily="34" charset="-120"/>
+              </a:rPr>
+              <a:t>Fuzz to find, debug to understand, mitigate to slow attackers</a:t>
+            </a:r>
+            <a:endParaRPr lang="en-US" sz="1400" dirty="0"/>
+          </a:p>
+          <a:p>
+            <a:pPr marL="342900" indent="-342900">
+              <a:spcAft>
+                <a:spcPts val="600"/>
+              </a:spcAft>
+              <a:buSzPct val="100000"/>
+              <a:buChar char="•"/>
+            </a:pPr>
+            <a:r>
+              <a:rPr lang="en-US" sz="1400" dirty="0">
+                <a:solidFill>
+                  <a:srgbClr val="1F2937"/>
+                </a:solidFill>
+                <a:latin typeface="Calibri" pitchFamily="34" charset="0"/>
+                <a:ea typeface="Calibri" pitchFamily="34" charset="-122"/>
+                <a:cs typeface="Calibri" pitchFamily="34" charset="-120"/>
+              </a:rPr>
+              <a:t>Mitigations ≠ cure — memory-safe languages are the cure</a:t>
+            </a:r>
+            <a:endParaRPr lang="en-US" sz="1400" dirty="0"/>
+          </a:p>
+          <a:p>
+            <a:pPr marL="342900" indent="-342900">
+              <a:spcAft>
+                <a:spcPts val="600"/>
+              </a:spcAft>
+              <a:buSzPct val="100000"/>
+              <a:buChar char="•"/>
+            </a:pPr>
+            <a:r>
+              <a:rPr lang="en-US" sz="1400" dirty="0">
+                <a:solidFill>
+                  <a:srgbClr val="1F2937"/>
+                </a:solidFill>
+                <a:latin typeface="Calibri" pitchFamily="34" charset="0"/>
+                <a:ea typeface="Calibri" pitchFamily="34" charset="-122"/>
+                <a:cs typeface="Calibri" pitchFamily="34" charset="-120"/>
+              </a:rPr>
+              <a:t>This is where the industry is moving</a:t>
+            </a:r>
+            <a:endParaRPr lang="en-US" sz="1400" dirty="0"/>
+          </a:p>
+        </p:txBody>
+      </p:sp>
+      <p:sp>
+        <p:nvSpPr>
+          <p:cNvPr id="7" name="Text 4"/>
+          <p:cNvSpPr/>
+          <p:nvPr/>
+        </p:nvSpPr>
+        <p:spPr>
+          <a:xfrm>
+            <a:off x="457200" y="4800600"/>
+            <a:ext cx="6949440" cy="274320"/>
+          </a:xfrm>
+          <a:prstGeom prst="rect">
+            <a:avLst/>
+          </a:prstGeom>
+          <a:noFill/>
+          <a:ln/>
+        </p:spPr>
+        <p:txBody>
+          <a:bodyPr wrap="square" lIns="0" tIns="0" rIns="0" bIns="0" rtlCol="0" anchor="ctr"/>
+          <a:lstStyle/>
+          <a:p>
+            <a:pPr indent="0" marL="0">
+              <a:buNone/>
+            </a:pPr>
+            <a:r>
+              <a:rPr lang="en-US" sz="900" dirty="0">
+                <a:solidFill>
+                  <a:srgbClr val="64748B"/>
+                </a:solidFill>
+                <a:latin typeface="Calibri" pitchFamily="34" charset="0"/>
+                <a:ea typeface="Calibri" pitchFamily="34" charset="-122"/>
+                <a:cs typeface="Calibri" pitchFamily="34" charset="-120"/>
+              </a:rPr>
+              <a:t>Software Security · Week 11</a:t>
+            </a:r>
+            <a:endParaRPr lang="en-US" sz="900" dirty="0"/>
+          </a:p>
+        </p:txBody>
+      </p:sp>
+      <p:pic>
+        <p:nvPicPr>
+          <p:cNvPr id="8" name="Image 1" descr="/Users/pop7/Library/CloudStorage/OneDrive-MonsterConnectCo.,Ltd/Lecture/KOSEN69 - software-security/slides/pptx/assets/logo-small.png">    </p:cNvPr>
+          <p:cNvPicPr>
+            <a:picLocks noChangeAspect="1"/>
+          </p:cNvPicPr>
+          <p:nvPr/>
+        </p:nvPicPr>
+        <p:blipFill>
+          <a:blip r:embed="rId2"/>
+          <a:stretch>
+            <a:fillRect/>
+          </a:stretch>
+        </p:blipFill>
+        <p:spPr>
+          <a:xfrm>
+            <a:off x="7882128" y="4700016"/>
+            <a:ext cx="768096" cy="356616"/>
+          </a:xfrm>
+          <a:prstGeom prst="rect">
+            <a:avLst/>
+          </a:prstGeom>
+        </p:spPr>
+      </p:pic>
+    </p:spTree>
+  </p:cSld>
+  <p:clrMapOvr>
+    <a:masterClrMapping/>
+  </p:clrMapOvr>
+</p:sld>
+</file>
+
+<file path=ppt/slides/slide14.xml><?xml version="1.0" encoding="utf-8"?>
+<p:sld xmlns:a="http://schemas.openxmlformats.org/drawingml/2006/main" xmlns:r="http://schemas.openxmlformats.org/officeDocument/2006/relationships" xmlns:p="http://schemas.openxmlformats.org/presentationml/2006/main">
+  <p:cSld name="Slide 14">
+    <p:bg>
+      <p:bgPr>
+        <a:solidFill>
+          <a:srgbClr val="FFFFFF"/>
+        </a:solidFill>
+      </p:bgPr>
+    </p:bg>
+    <p:spTree>
+      <p:nvGrpSpPr>
+        <p:cNvPr id="1" name=""/>
+        <p:cNvGrpSpPr/>
+        <p:nvPr/>
+      </p:nvGrpSpPr>
+      <p:grpSpPr>
+        <a:xfrm>
+          <a:off x="0" y="0"/>
+          <a:ext cx="0" cy="0"/>
+          <a:chOff x="0" y="0"/>
+          <a:chExt cx="0" cy="0"/>
+        </a:xfrm>
+      </p:grpSpPr>
+      <p:sp>
+        <p:nvSpPr>
           <p:cNvPr id="2" name="Text 0"/>
           <p:cNvSpPr/>
           <p:nvPr/>
@@ -4167,91 +4557,6 @@
         <p:spPr>
           <a:xfrm>
             <a:off x="457200" y="1325880"/>
-            <a:ext cx="8229600" cy="713232"/>
-          </a:xfrm>
-          <a:prstGeom prst="roundRect">
-            <a:avLst>
-              <a:gd name="adj" fmla="val 7692"/>
-            </a:avLst>
-          </a:prstGeom>
-          <a:solidFill>
-            <a:srgbClr val="0A1020"/>
-          </a:solidFill>
-          <a:ln w="12700">
-            <a:solidFill>
-              <a:srgbClr val="E8EDF3"/>
-            </a:solidFill>
-            <a:prstDash val="solid"/>
-          </a:ln>
-        </p:spPr>
-      </p:sp>
-      <p:sp>
-        <p:nvSpPr>
-          <p:cNvPr id="6" name="Text 3"/>
-          <p:cNvSpPr/>
-          <p:nvPr/>
-        </p:nvSpPr>
-        <p:spPr>
-          <a:xfrm>
-            <a:off x="640080" y="1399032"/>
-            <a:ext cx="7863840" cy="566928"/>
-          </a:xfrm>
-          <a:prstGeom prst="rect">
-            <a:avLst/>
-          </a:prstGeom>
-          <a:noFill/>
-          <a:ln/>
-        </p:spPr>
-        <p:txBody>
-          <a:bodyPr wrap="square" lIns="0" tIns="0" rIns="0" bIns="0" rtlCol="0" anchor="t">
-            <a:normAutofit/>
-          </a:bodyPr>
-          <a:lstStyle/>
-          <a:p>
-            <a:pPr indent="0" marL="0">
-              <a:buNone/>
-            </a:pPr>
-            <a:r>
-              <a:rPr lang="en-US" sz="1150" dirty="0">
-                <a:solidFill>
-                  <a:srgbClr val="9FE7D6"/>
-                </a:solidFill>
-                <a:latin typeface="Courier New" pitchFamily="34" charset="0"/>
-                <a:ea typeface="Courier New" pitchFamily="34" charset="-122"/>
-                <a:cs typeface="Courier New" pitchFamily="34" charset="-120"/>
-              </a:rPr>
-              <a:t>[ buffer ][ saved registers ][ return address ]</a:t>
-            </a:r>
-            <a:endParaRPr lang="en-US" sz="1150" dirty="0"/>
-          </a:p>
-          <a:p>
-            <a:pPr indent="0" marL="0">
-              <a:buNone/>
-            </a:pPr>
-            <a:r>
-              <a:rPr lang="en-US" sz="1150" dirty="0">
-                <a:solidFill>
-                  <a:srgbClr val="9FE7D6"/>
-                </a:solidFill>
-                <a:latin typeface="Courier New" pitchFamily="34" charset="0"/>
-                <a:ea typeface="Courier New" pitchFamily="34" charset="-122"/>
-                <a:cs typeface="Courier New" pitchFamily="34" charset="-120"/>
-              </a:rPr>
-              <a:t>                                    ↑ overwrite this</a:t>
-            </a:r>
-            <a:endParaRPr lang="en-US" sz="1150" dirty="0"/>
-          </a:p>
-        </p:txBody>
-      </p:sp>
-      <p:sp>
-        <p:nvSpPr>
-          <p:cNvPr id="7" name="Shape 4"/>
-          <p:cNvSpPr/>
-          <p:nvPr/>
-        </p:nvSpPr>
-        <p:spPr>
-          <a:xfrm>
-            <a:off x="457200" y="2203704"/>
             <a:ext cx="8229600" cy="896112"/>
           </a:xfrm>
           <a:prstGeom prst="roundRect">
@@ -4274,13 +4579,13 @@
       </p:sp>
       <p:sp>
         <p:nvSpPr>
-          <p:cNvPr id="8" name="Text 5"/>
-          <p:cNvSpPr/>
-          <p:nvPr/>
-        </p:nvSpPr>
-        <p:spPr>
-          <a:xfrm>
-            <a:off x="731520" y="2313432"/>
+          <p:cNvPr id="6" name="Text 3"/>
+          <p:cNvSpPr/>
+          <p:nvPr/>
+        </p:nvSpPr>
+        <p:spPr>
+          <a:xfrm>
+            <a:off x="731520" y="1435608"/>
             <a:ext cx="7680960" cy="676656"/>
           </a:xfrm>
           <a:prstGeom prst="rect">
@@ -4340,14 +4645,14 @@
       </p:sp>
       <p:sp>
         <p:nvSpPr>
-          <p:cNvPr id="9" name="Text 6"/>
-          <p:cNvSpPr/>
-          <p:nvPr/>
-        </p:nvSpPr>
-        <p:spPr>
-          <a:xfrm>
-            <a:off x="457200" y="4800600"/>
-            <a:ext cx="6949440" cy="274320"/>
+          <p:cNvPr id="7" name="Text 4"/>
+          <p:cNvSpPr/>
+          <p:nvPr/>
+        </p:nvSpPr>
+        <p:spPr>
+          <a:xfrm>
+            <a:off x="548640" y="2386584"/>
+            <a:ext cx="8046720" cy="548640"/>
           </a:xfrm>
           <a:prstGeom prst="rect">
             <a:avLst/>
@@ -4356,21 +4661,62 @@
           <a:ln/>
         </p:spPr>
         <p:txBody>
-          <a:bodyPr wrap="square" lIns="0" tIns="0" rIns="0" bIns="0" rtlCol="0" anchor="ctr"/>
+          <a:bodyPr wrap="square" lIns="0" tIns="0" rIns="0" bIns="0" rtlCol="0" anchor="t">
+            <a:normAutofit/>
+          </a:bodyPr>
           <a:lstStyle/>
           <a:p>
             <a:pPr indent="0" marL="0">
               <a:buNone/>
             </a:pPr>
             <a:r>
-              <a:rPr lang="en-US" sz="900" dirty="0">
-                <a:solidFill>
-                  <a:srgbClr val="64748B"/>
+              <a:rPr lang="en-US" sz="1400" dirty="0">
+                <a:solidFill>
+                  <a:srgbClr val="1F2937"/>
                 </a:solidFill>
                 <a:latin typeface="Calibri" pitchFamily="34" charset="0"/>
                 <a:ea typeface="Calibri" pitchFamily="34" charset="-122"/>
                 <a:cs typeface="Calibri" pitchFamily="34" charset="-120"/>
               </a:rPr>
+              <a:t>Try it live: /sim/stack-frame (interactive simulation, web only)</a:t>
+            </a:r>
+            <a:endParaRPr lang="en-US" sz="1400" dirty="0"/>
+          </a:p>
+        </p:txBody>
+      </p:sp>
+      <p:sp>
+        <p:nvSpPr>
+          <p:cNvPr id="8" name="Text 5"/>
+          <p:cNvSpPr/>
+          <p:nvPr/>
+        </p:nvSpPr>
+        <p:spPr>
+          <a:xfrm>
+            <a:off x="457200" y="4800600"/>
+            <a:ext cx="6949440" cy="274320"/>
+          </a:xfrm>
+          <a:prstGeom prst="rect">
+            <a:avLst/>
+          </a:prstGeom>
+          <a:noFill/>
+          <a:ln/>
+        </p:spPr>
+        <p:txBody>
+          <a:bodyPr wrap="square" lIns="0" tIns="0" rIns="0" bIns="0" rtlCol="0" anchor="ctr"/>
+          <a:lstStyle/>
+          <a:p>
+            <a:pPr indent="0" marL="0">
+              <a:buNone/>
+            </a:pPr>
+            <a:r>
+              <a:rPr lang="en-US" sz="900" dirty="0">
+                <a:solidFill>
+                  <a:srgbClr val="64748B"/>
+                </a:solidFill>
+                <a:latin typeface="Calibri" pitchFamily="34" charset="0"/>
+                <a:ea typeface="Calibri" pitchFamily="34" charset="-122"/>
+                <a:cs typeface="Calibri" pitchFamily="34" charset="-120"/>
+              </a:rPr>
               <a:t>Software Security · Week 11</a:t>
             </a:r>
             <a:endParaRPr lang="en-US" sz="900" dirty="0"/>
@@ -4379,7 +4725,7 @@
       </p:sp>
       <p:pic>
         <p:nvPicPr>
-          <p:cNvPr id="10" name="Image 1" descr="/Users/pop7/Library/CloudStorage/OneDrive-MonsterConnectCo.,Ltd/Lecture/KOSEN69 - software-security/slides/pptx/assets/logo-small.png">    </p:cNvPr>
+          <p:cNvPr id="9" name="Image 1" descr="/Users/pop7/Library/CloudStorage/OneDrive-MonsterConnectCo.,Ltd/Lecture/KOSEN69 - software-security/slides/pptx/assets/logo-small.png">    </p:cNvPr>
           <p:cNvPicPr>
             <a:picLocks noChangeAspect="1"/>
           </p:cNvPicPr>
@@ -6011,7 +6357,7 @@
                 <a:ea typeface="Arial" pitchFamily="34" charset="-122"/>
                 <a:cs typeface="Arial" pitchFamily="34" charset="-120"/>
               </a:rPr>
-              <a:t>The real fix: memory-safe languages</a:t>
+              <a:t>From strcpy to shell — where each mitigation cuts the chain</a:t>
             </a:r>
             <a:endParaRPr lang="en-US" sz="2600" dirty="0"/>
           </a:p>
@@ -6019,43 +6365,14 @@
       </p:sp>
       <p:sp>
         <p:nvSpPr>
-          <p:cNvPr id="5" name="Shape 2"/>
-          <p:cNvSpPr/>
-          <p:nvPr/>
-        </p:nvSpPr>
-        <p:spPr>
-          <a:xfrm>
-            <a:off x="457200" y="1325880"/>
-            <a:ext cx="8229600" cy="1207008"/>
-          </a:xfrm>
-          <a:prstGeom prst="roundRect">
-            <a:avLst>
-              <a:gd name="adj" fmla="val 6061"/>
-            </a:avLst>
-          </a:prstGeom>
-          <a:solidFill>
-            <a:srgbClr val="F1F5F9"/>
-          </a:solidFill>
-          <a:ln/>
-          <a:effectLst>
-            <a:outerShdw sx="100000" sy="100000" kx="0" ky="0" algn="bl" rotWithShape="0" blurRad="76200" dist="25400" dir="5400000">
-              <a:srgbClr val="000000">
-                <a:alpha val="12000"/>
-              </a:srgbClr>
-            </a:outerShdw>
-          </a:effectLst>
-        </p:spPr>
-      </p:sp>
-      <p:sp>
-        <p:nvSpPr>
-          <p:cNvPr id="6" name="Text 3"/>
-          <p:cNvSpPr/>
-          <p:nvPr/>
-        </p:nvSpPr>
-        <p:spPr>
-          <a:xfrm>
-            <a:off x="731520" y="1435608"/>
-            <a:ext cx="7680960" cy="987552"/>
+          <p:cNvPr id="5" name="Text 2"/>
+          <p:cNvSpPr/>
+          <p:nvPr/>
+        </p:nvSpPr>
+        <p:spPr>
+          <a:xfrm>
+            <a:off x="548640" y="1325880"/>
+            <a:ext cx="8046720" cy="2194560"/>
           </a:xfrm>
           <a:prstGeom prst="rect">
             <a:avLst/>
@@ -6069,12 +6386,8 @@
           </a:bodyPr>
           <a:lstStyle/>
           <a:p>
-            <a:pPr marL="342900" indent="-342900">
-              <a:spcAft>
-                <a:spcPts val="600"/>
-              </a:spcAft>
-              <a:buSzPct val="100000"/>
-              <a:buChar char="•"/>
+            <a:pPr indent="0" marL="0">
+              <a:buNone/>
             </a:pPr>
             <a:r>
               <a:rPr lang="en-US" sz="1400" dirty="0">
@@ -6085,87 +6398,45 @@
                 <a:ea typeface="Calibri" pitchFamily="34" charset="-122"/>
                 <a:cs typeface="Calibri" pitchFamily="34" charset="-120"/>
               </a:rPr>
-              <a:t>Rust / Go remove whole bug classes by design</a:t>
+              <a:t>See diagram: A vertical attack chain from fuzzing finding the crash, to the unchecked strcpy overflow, to the overwritten return address, to a ret2win shell. Three mitigations cut this chain at different links: FORTIFY_SOURCE aborts at copy time, before any overwrite — this hardened build traps here, which students often misread as the canary. The stack canary only detects the smash at return, after the copy already happened. ASLR/PIE randomizes addresses so the fixed win() address is wrong. NX/DEP stops the OTHER exploitation path (injected shellcode), not this one. (web only)</a:t>
             </a:r>
             <a:endParaRPr lang="en-US" sz="1400" dirty="0"/>
           </a:p>
-          <a:p>
-            <a:pPr marL="342900" indent="-342900">
-              <a:spcAft>
-                <a:spcPts val="600"/>
-              </a:spcAft>
-              <a:buSzPct val="100000"/>
-              <a:buChar char="•"/>
-            </a:pPr>
-            <a:r>
-              <a:rPr lang="en-US" sz="1400" dirty="0">
-                <a:solidFill>
-                  <a:srgbClr val="1F2937"/>
+        </p:txBody>
+      </p:sp>
+      <p:sp>
+        <p:nvSpPr>
+          <p:cNvPr id="6" name="Text 3"/>
+          <p:cNvSpPr/>
+          <p:nvPr/>
+        </p:nvSpPr>
+        <p:spPr>
+          <a:xfrm>
+            <a:off x="457200" y="4800600"/>
+            <a:ext cx="6949440" cy="274320"/>
+          </a:xfrm>
+          <a:prstGeom prst="rect">
+            <a:avLst/>
+          </a:prstGeom>
+          <a:noFill/>
+          <a:ln/>
+        </p:spPr>
+        <p:txBody>
+          <a:bodyPr wrap="square" lIns="0" tIns="0" rIns="0" bIns="0" rtlCol="0" anchor="ctr"/>
+          <a:lstStyle/>
+          <a:p>
+            <a:pPr indent="0" marL="0">
+              <a:buNone/>
+            </a:pPr>
+            <a:r>
+              <a:rPr lang="en-US" sz="900" dirty="0">
+                <a:solidFill>
+                  <a:srgbClr val="64748B"/>
                 </a:solidFill>
                 <a:latin typeface="Calibri" pitchFamily="34" charset="0"/>
                 <a:ea typeface="Calibri" pitchFamily="34" charset="-122"/>
                 <a:cs typeface="Calibri" pitchFamily="34" charset="-120"/>
               </a:rPr>
-              <a:t>CISA "Secure by Design" + ONCD: move off C/C++ for new code</a:t>
-            </a:r>
-            <a:endParaRPr lang="en-US" sz="1400" dirty="0"/>
-          </a:p>
-          <a:p>
-            <a:pPr marL="342900" indent="-342900">
-              <a:spcAft>
-                <a:spcPts val="600"/>
-              </a:spcAft>
-              <a:buSzPct val="100000"/>
-              <a:buChar char="•"/>
-            </a:pPr>
-            <a:r>
-              <a:rPr lang="en-US" sz="1400" dirty="0">
-                <a:solidFill>
-                  <a:srgbClr val="1F2937"/>
-                </a:solidFill>
-                <a:latin typeface="Calibri" pitchFamily="34" charset="0"/>
-                <a:ea typeface="Calibri" pitchFamily="34" charset="-122"/>
-                <a:cs typeface="Calibri" pitchFamily="34" charset="-120"/>
-              </a:rPr>
-              <a:t>Borrow checker / bounds checks = no overflow, no UAF</a:t>
-            </a:r>
-            <a:endParaRPr lang="en-US" sz="1400" dirty="0"/>
-          </a:p>
-        </p:txBody>
-      </p:sp>
-      <p:sp>
-        <p:nvSpPr>
-          <p:cNvPr id="7" name="Text 4"/>
-          <p:cNvSpPr/>
-          <p:nvPr/>
-        </p:nvSpPr>
-        <p:spPr>
-          <a:xfrm>
-            <a:off x="457200" y="4800600"/>
-            <a:ext cx="6949440" cy="274320"/>
-          </a:xfrm>
-          <a:prstGeom prst="rect">
-            <a:avLst/>
-          </a:prstGeom>
-          <a:noFill/>
-          <a:ln/>
-        </p:spPr>
-        <p:txBody>
-          <a:bodyPr wrap="square" lIns="0" tIns="0" rIns="0" bIns="0" rtlCol="0" anchor="ctr"/>
-          <a:lstStyle/>
-          <a:p>
-            <a:pPr indent="0" marL="0">
-              <a:buNone/>
-            </a:pPr>
-            <a:r>
-              <a:rPr lang="en-US" sz="900" dirty="0">
-                <a:solidFill>
-                  <a:srgbClr val="64748B"/>
-                </a:solidFill>
-                <a:latin typeface="Calibri" pitchFamily="34" charset="0"/>
-                <a:ea typeface="Calibri" pitchFamily="34" charset="-122"/>
-                <a:cs typeface="Calibri" pitchFamily="34" charset="-120"/>
-              </a:rPr>
               <a:t>Software Security · Week 11</a:t>
             </a:r>
             <a:endParaRPr lang="en-US" sz="900" dirty="0"/>
@@ -6174,7 +6445,7 @@
       </p:sp>
       <p:pic>
         <p:nvPicPr>
-          <p:cNvPr id="8" name="Image 1" descr="/Users/pop7/Library/CloudStorage/OneDrive-MonsterConnectCo.,Ltd/Lecture/KOSEN69 - software-security/slides/pptx/assets/logo-small.png">    </p:cNvPr>
+          <p:cNvPr id="7" name="Image 1" descr="/Users/pop7/Library/CloudStorage/OneDrive-MonsterConnectCo.,Ltd/Lecture/KOSEN69 - software-security/slides/pptx/assets/logo-small.png">    </p:cNvPr>
           <p:cNvPicPr>
             <a:picLocks noChangeAspect="1"/>
           </p:cNvPicPr>
